--- a/課題データ分析レポート.pptx
+++ b/課題データ分析レポート.pptx
@@ -16,6 +16,8 @@
     <p:sldId id="264" r:id="rId15"/>
     <p:sldId id="265" r:id="rId16"/>
     <p:sldId id="266" r:id="rId17"/>
+    <p:sldId id="267" r:id="rId18"/>
+    <p:sldId id="268" r:id="rId19"/>
   </p:sldIdLst>
   <p:sldSz cx="12188952" cy="6858000" type="screen4x3"/>
   <p:notesSz cx="6858000" cy="9144000"/>
@@ -3517,7 +3519,937 @@
                 </a:solidFill>
                 <a:latin typeface="游ゴシック"/>
               </a:rPr>
-              <a:t>課題2｜受講者別パフォーマンス詳細</a:t>
+              <a:t>課題2｜受講者×科目 スコアヒートマップ（学校データ）</a:t>
+            </a:r>
+          </a:p>
+        </p:txBody>
+      </p:sp>
+      <p:sp>
+        <p:nvSpPr>
+          <p:cNvPr id="5" name="TextBox 4"/>
+          <p:cNvSpPr txBox="1"/>
+          <p:nvPr/>
+        </p:nvSpPr>
+        <p:spPr>
+          <a:xfrm>
+            <a:off x="320040" y="612648"/>
+            <a:ext cx="8686800" cy="347472"/>
+          </a:xfrm>
+          <a:prstGeom prst="rect">
+            <a:avLst/>
+          </a:prstGeom>
+          <a:noFill/>
+        </p:spPr>
+        <p:txBody>
+          <a:bodyPr wrap="square">
+            <a:spAutoFit/>
+          </a:bodyPr>
+          <a:lstStyle/>
+          <a:p>
+            <a:pPr algn="l"/>
+            <a:r>
+              <a:rPr sz="1200" b="0" i="0">
+                <a:solidFill>
+                  <a:srgbClr val="D6E4F7"/>
+                </a:solidFill>
+                <a:latin typeface="游ゴシック"/>
+              </a:rPr>
+              <a:t>赤（低）→黄（中）→緑（高）のグラデーション</a:t>
+            </a:r>
+          </a:p>
+        </p:txBody>
+      </p:sp>
+      <p:sp>
+        <p:nvSpPr>
+          <p:cNvPr id="6" name="Rectangle 5"/>
+          <p:cNvSpPr/>
+          <p:nvPr/>
+        </p:nvSpPr>
+        <p:spPr>
+          <a:xfrm>
+            <a:off x="0" y="6565392"/>
+            <a:ext cx="12188952" cy="292608"/>
+          </a:xfrm>
+          <a:prstGeom prst="rect">
+            <a:avLst/>
+          </a:prstGeom>
+          <a:solidFill>
+            <a:srgbClr val="1A2F5E"/>
+          </a:solidFill>
+          <a:ln>
+            <a:noFill/>
+          </a:ln>
+        </p:spPr>
+        <p:style>
+          <a:lnRef idx="1">
+            <a:schemeClr val="accent1"/>
+          </a:lnRef>
+          <a:fillRef idx="3">
+            <a:schemeClr val="accent1"/>
+          </a:fillRef>
+          <a:effectRef idx="2">
+            <a:schemeClr val="accent1"/>
+          </a:effectRef>
+          <a:fontRef idx="minor">
+            <a:schemeClr val="lt1"/>
+          </a:fontRef>
+        </p:style>
+        <p:txBody>
+          <a:bodyPr rtlCol="0" anchor="ctr"/>
+          <a:lstStyle/>
+          <a:p>
+            <a:pPr algn="ctr"/>
+          </a:p>
+        </p:txBody>
+      </p:sp>
+      <p:pic>
+        <p:nvPicPr>
+          <p:cNvPr id="7" name="Picture 6" descr="graph5_heatmap.png"/>
+          <p:cNvPicPr>
+            <a:picLocks noChangeAspect="1"/>
+          </p:cNvPicPr>
+          <p:nvPr/>
+        </p:nvPicPr>
+        <p:blipFill>
+          <a:blip r:embed="rId2"/>
+          <a:stretch>
+            <a:fillRect/>
+          </a:stretch>
+        </p:blipFill>
+        <p:spPr>
+          <a:xfrm>
+            <a:off x="274320" y="1051560"/>
+            <a:ext cx="7315200" cy="5349240"/>
+          </a:xfrm>
+          <a:prstGeom prst="rect">
+            <a:avLst/>
+          </a:prstGeom>
+        </p:spPr>
+      </p:pic>
+      <p:sp>
+        <p:nvSpPr>
+          <p:cNvPr id="8" name="Rectangle 7"/>
+          <p:cNvSpPr/>
+          <p:nvPr/>
+        </p:nvSpPr>
+        <p:spPr>
+          <a:xfrm>
+            <a:off x="7772400" y="1051560"/>
+            <a:ext cx="4160520" cy="5349240"/>
+          </a:xfrm>
+          <a:prstGeom prst="rect">
+            <a:avLst/>
+          </a:prstGeom>
+          <a:solidFill>
+            <a:srgbClr val="F5F5F5"/>
+          </a:solidFill>
+          <a:ln>
+            <a:noFill/>
+          </a:ln>
+        </p:spPr>
+        <p:style>
+          <a:lnRef idx="1">
+            <a:schemeClr val="accent1"/>
+          </a:lnRef>
+          <a:fillRef idx="3">
+            <a:schemeClr val="accent1"/>
+          </a:fillRef>
+          <a:effectRef idx="2">
+            <a:schemeClr val="accent1"/>
+          </a:effectRef>
+          <a:fontRef idx="minor">
+            <a:schemeClr val="lt1"/>
+          </a:fontRef>
+        </p:style>
+        <p:txBody>
+          <a:bodyPr rtlCol="0" anchor="ctr"/>
+          <a:lstStyle/>
+          <a:p>
+            <a:pPr algn="ctr"/>
+          </a:p>
+        </p:txBody>
+      </p:sp>
+      <p:sp>
+        <p:nvSpPr>
+          <p:cNvPr id="9" name="Rectangle 8"/>
+          <p:cNvSpPr/>
+          <p:nvPr/>
+        </p:nvSpPr>
+        <p:spPr>
+          <a:xfrm>
+            <a:off x="7772400" y="1051560"/>
+            <a:ext cx="64008" cy="5349240"/>
+          </a:xfrm>
+          <a:prstGeom prst="rect">
+            <a:avLst/>
+          </a:prstGeom>
+          <a:solidFill>
+            <a:srgbClr val="2E75B6"/>
+          </a:solidFill>
+          <a:ln>
+            <a:noFill/>
+          </a:ln>
+        </p:spPr>
+        <p:style>
+          <a:lnRef idx="1">
+            <a:schemeClr val="accent1"/>
+          </a:lnRef>
+          <a:fillRef idx="3">
+            <a:schemeClr val="accent1"/>
+          </a:fillRef>
+          <a:effectRef idx="2">
+            <a:schemeClr val="accent1"/>
+          </a:effectRef>
+          <a:fontRef idx="minor">
+            <a:schemeClr val="lt1"/>
+          </a:fontRef>
+        </p:style>
+        <p:txBody>
+          <a:bodyPr rtlCol="0" anchor="ctr"/>
+          <a:lstStyle/>
+          <a:p>
+            <a:pPr algn="ctr"/>
+          </a:p>
+        </p:txBody>
+      </p:sp>
+      <p:sp>
+        <p:nvSpPr>
+          <p:cNvPr id="10" name="TextBox 9"/>
+          <p:cNvSpPr txBox="1"/>
+          <p:nvPr/>
+        </p:nvSpPr>
+        <p:spPr>
+          <a:xfrm>
+            <a:off x="7936992" y="1143000"/>
+            <a:ext cx="3931920" cy="365760"/>
+          </a:xfrm>
+          <a:prstGeom prst="rect">
+            <a:avLst/>
+          </a:prstGeom>
+          <a:noFill/>
+        </p:spPr>
+        <p:txBody>
+          <a:bodyPr wrap="square">
+            <a:spAutoFit/>
+          </a:bodyPr>
+          <a:lstStyle/>
+          <a:p>
+            <a:pPr algn="l"/>
+            <a:r>
+              <a:rPr sz="1300" b="1" i="0">
+                <a:solidFill>
+                  <a:srgbClr val="2E75B6"/>
+                </a:solidFill>
+                <a:latin typeface="游ゴシック"/>
+              </a:rPr>
+              <a:t>科目別・個人別の弱点マップ</a:t>
+            </a:r>
+          </a:p>
+        </p:txBody>
+      </p:sp>
+      <p:sp>
+        <p:nvSpPr>
+          <p:cNvPr id="11" name="TextBox 10"/>
+          <p:cNvSpPr txBox="1"/>
+          <p:nvPr/>
+        </p:nvSpPr>
+        <p:spPr>
+          <a:xfrm>
+            <a:off x="7936992" y="1554480"/>
+            <a:ext cx="3886200" cy="4754879"/>
+          </a:xfrm>
+          <a:prstGeom prst="rect">
+            <a:avLst/>
+          </a:prstGeom>
+          <a:noFill/>
+        </p:spPr>
+        <p:txBody>
+          <a:bodyPr wrap="square">
+            <a:spAutoFit/>
+          </a:bodyPr>
+          <a:lstStyle/>
+          <a:p>
+            <a:pPr algn="l">
+              <a:spcAft>
+                <a:spcPts val="300"/>
+              </a:spcAft>
+            </a:pPr>
+            <a:r>
+              <a:rPr sz="1200" b="0">
+                <a:solidFill>
+                  <a:srgbClr val="444444"/>
+                </a:solidFill>
+                <a:latin typeface="游ゴシック"/>
+              </a:rPr>
+              <a:t>■ 科目別平均（高→低）</a:t>
+            </a:r>
+          </a:p>
+          <a:p>
+            <a:pPr algn="l">
+              <a:spcAft>
+                <a:spcPts val="300"/>
+              </a:spcAft>
+            </a:pPr>
+            <a:r>
+              <a:rPr sz="1200" b="0">
+                <a:solidFill>
+                  <a:srgbClr val="444444"/>
+                </a:solidFill>
+                <a:latin typeface="游ゴシック"/>
+              </a:rPr>
+              <a:t>  英語   86.7点  ← 最も得意</a:t>
+            </a:r>
+          </a:p>
+          <a:p>
+            <a:pPr algn="l">
+              <a:spcAft>
+                <a:spcPts val="300"/>
+              </a:spcAft>
+            </a:pPr>
+            <a:r>
+              <a:rPr sz="1200" b="0">
+                <a:solidFill>
+                  <a:srgbClr val="444444"/>
+                </a:solidFill>
+                <a:latin typeface="游ゴシック"/>
+              </a:rPr>
+              <a:t>  社会   85.0点</a:t>
+            </a:r>
+          </a:p>
+          <a:p>
+            <a:pPr algn="l">
+              <a:spcAft>
+                <a:spcPts val="300"/>
+              </a:spcAft>
+            </a:pPr>
+            <a:r>
+              <a:rPr sz="1200" b="0">
+                <a:solidFill>
+                  <a:srgbClr val="444444"/>
+                </a:solidFill>
+                <a:latin typeface="游ゴシック"/>
+              </a:rPr>
+              <a:t>  数学   84.8点</a:t>
+            </a:r>
+          </a:p>
+          <a:p>
+            <a:pPr algn="l">
+              <a:spcAft>
+                <a:spcPts val="300"/>
+              </a:spcAft>
+            </a:pPr>
+            <a:r>
+              <a:rPr sz="1200" b="0">
+                <a:solidFill>
+                  <a:srgbClr val="444444"/>
+                </a:solidFill>
+                <a:latin typeface="游ゴシック"/>
+              </a:rPr>
+              <a:t>  理科   84.4点</a:t>
+            </a:r>
+          </a:p>
+          <a:p>
+            <a:pPr algn="l">
+              <a:spcAft>
+                <a:spcPts val="300"/>
+              </a:spcAft>
+            </a:pPr>
+            <a:r>
+              <a:rPr sz="1200" b="0">
+                <a:solidFill>
+                  <a:srgbClr val="444444"/>
+                </a:solidFill>
+                <a:latin typeface="游ゴシック"/>
+              </a:rPr>
+              <a:t>  国語   83.7点  ← 最も苦手</a:t>
+            </a:r>
+          </a:p>
+          <a:p>
+            <a:pPr algn="l">
+              <a:spcAft>
+                <a:spcPts val="300"/>
+              </a:spcAft>
+            </a:pPr>
+            <a:r>
+              <a:rPr sz="1200" b="0">
+                <a:solidFill>
+                  <a:srgbClr val="444444"/>
+                </a:solidFill>
+                <a:latin typeface="游ゴシック"/>
+              </a:rPr>
+              <a:t/>
+            </a:r>
+          </a:p>
+          <a:p>
+            <a:pPr algn="l">
+              <a:spcAft>
+                <a:spcPts val="300"/>
+              </a:spcAft>
+            </a:pPr>
+            <a:r>
+              <a:rPr sz="1200" b="0">
+                <a:solidFill>
+                  <a:srgbClr val="444444"/>
+                </a:solidFill>
+                <a:latin typeface="游ゴシック"/>
+              </a:rPr>
+              <a:t>■ 個人の弱点科目</a:t>
+            </a:r>
+          </a:p>
+          <a:p>
+            <a:pPr algn="l">
+              <a:spcAft>
+                <a:spcPts val="300"/>
+              </a:spcAft>
+            </a:pPr>
+            <a:r>
+              <a:rPr sz="1200" b="0">
+                <a:solidFill>
+                  <a:srgbClr val="444444"/>
+                </a:solidFill>
+                <a:latin typeface="游ゴシック"/>
+              </a:rPr>
+              <a:t>  佐藤次郎：国語65点・社会68点</a:t>
+            </a:r>
+          </a:p>
+          <a:p>
+            <a:pPr algn="l">
+              <a:spcAft>
+                <a:spcPts val="300"/>
+              </a:spcAft>
+            </a:pPr>
+            <a:r>
+              <a:rPr sz="1200" b="0">
+                <a:solidFill>
+                  <a:srgbClr val="444444"/>
+                </a:solidFill>
+                <a:latin typeface="游ゴシック"/>
+              </a:rPr>
+              <a:t>  　→ 文系科目に集中した弱点</a:t>
+            </a:r>
+          </a:p>
+          <a:p>
+            <a:pPr algn="l">
+              <a:spcAft>
+                <a:spcPts val="300"/>
+              </a:spcAft>
+            </a:pPr>
+            <a:r>
+              <a:rPr sz="1200" b="0">
+                <a:solidFill>
+                  <a:srgbClr val="444444"/>
+                </a:solidFill>
+                <a:latin typeface="游ゴシック"/>
+              </a:rPr>
+              <a:t>  山田太郎：国語75点が足を引く</a:t>
+            </a:r>
+          </a:p>
+          <a:p>
+            <a:pPr algn="l">
+              <a:spcAft>
+                <a:spcPts val="300"/>
+              </a:spcAft>
+            </a:pPr>
+            <a:r>
+              <a:rPr sz="1200" b="0">
+                <a:solidFill>
+                  <a:srgbClr val="444444"/>
+                </a:solidFill>
+                <a:latin typeface="游ゴシック"/>
+              </a:rPr>
+              <a:t>  鈴木花子：理科80点が他より低い</a:t>
+            </a:r>
+          </a:p>
+          <a:p>
+            <a:pPr algn="l">
+              <a:spcAft>
+                <a:spcPts val="300"/>
+              </a:spcAft>
+            </a:pPr>
+            <a:r>
+              <a:rPr sz="1200" b="0">
+                <a:solidFill>
+                  <a:srgbClr val="444444"/>
+                </a:solidFill>
+                <a:latin typeface="游ゴシック"/>
+              </a:rPr>
+              <a:t/>
+            </a:r>
+          </a:p>
+          <a:p>
+            <a:pPr algn="l">
+              <a:spcAft>
+                <a:spcPts val="300"/>
+              </a:spcAft>
+            </a:pPr>
+            <a:r>
+              <a:rPr sz="1200" b="0">
+                <a:solidFill>
+                  <a:srgbClr val="444444"/>
+                </a:solidFill>
+                <a:latin typeface="游ゴシック"/>
+              </a:rPr>
+              <a:t>■ マーケティング示唆</a:t>
+            </a:r>
+          </a:p>
+          <a:p>
+            <a:pPr algn="l">
+              <a:spcAft>
+                <a:spcPts val="300"/>
+              </a:spcAft>
+            </a:pPr>
+            <a:r>
+              <a:rPr sz="1200" b="0">
+                <a:solidFill>
+                  <a:srgbClr val="444444"/>
+                </a:solidFill>
+                <a:latin typeface="游ゴシック"/>
+              </a:rPr>
+              <a:t>  弱点は「人×科目」の組み合わせで</a:t>
+            </a:r>
+          </a:p>
+          <a:p>
+            <a:pPr algn="l">
+              <a:spcAft>
+                <a:spcPts val="300"/>
+              </a:spcAft>
+            </a:pPr>
+            <a:r>
+              <a:rPr sz="1200" b="0">
+                <a:solidFill>
+                  <a:srgbClr val="444444"/>
+                </a:solidFill>
+                <a:latin typeface="游ゴシック"/>
+              </a:rPr>
+              <a:t>  特定できる。全員一律の研修より</a:t>
+            </a:r>
+          </a:p>
+          <a:p>
+            <a:pPr algn="l">
+              <a:spcAft>
+                <a:spcPts val="300"/>
+              </a:spcAft>
+            </a:pPr>
+            <a:r>
+              <a:rPr sz="1200" b="0">
+                <a:solidFill>
+                  <a:srgbClr val="444444"/>
+                </a:solidFill>
+                <a:latin typeface="游ゴシック"/>
+              </a:rPr>
+              <a:t>  弱点科目への個別フォローが</a:t>
+            </a:r>
+          </a:p>
+          <a:p>
+            <a:pPr algn="l">
+              <a:spcAft>
+                <a:spcPts val="300"/>
+              </a:spcAft>
+            </a:pPr>
+            <a:r>
+              <a:rPr sz="1200" b="0">
+                <a:solidFill>
+                  <a:srgbClr val="444444"/>
+                </a:solidFill>
+                <a:latin typeface="游ゴシック"/>
+              </a:rPr>
+              <a:t>  最短で全体平均を引き上げる。</a:t>
+            </a:r>
+          </a:p>
+        </p:txBody>
+      </p:sp>
+    </p:spTree>
+  </p:cSld>
+  <p:clrMapOvr>
+    <a:masterClrMapping/>
+  </p:clrMapOvr>
+</p:sld>
+</file>
+
+<file path=ppt/slides/slide11.xml><?xml version="1.0" encoding="utf-8"?>
+<p:sld xmlns:a="http://schemas.openxmlformats.org/drawingml/2006/main" xmlns:p="http://schemas.openxmlformats.org/presentationml/2006/main" xmlns:r="http://schemas.openxmlformats.org/officeDocument/2006/relationships">
+  <p:cSld>
+    <p:bg>
+      <p:bgPr>
+        <a:solidFill>
+          <a:srgbClr val="FFFFFF"/>
+        </a:solidFill>
+        <a:effectLst/>
+      </p:bgPr>
+    </p:bg>
+    <p:spTree>
+      <p:nvGrpSpPr>
+        <p:cNvPr id="1" name=""/>
+        <p:cNvGrpSpPr/>
+        <p:nvPr/>
+      </p:nvGrpSpPr>
+      <p:grpSpPr/>
+      <p:sp>
+        <p:nvSpPr>
+          <p:cNvPr id="2" name="Rectangle 1"/>
+          <p:cNvSpPr/>
+          <p:nvPr/>
+        </p:nvSpPr>
+        <p:spPr>
+          <a:xfrm>
+            <a:off x="0" y="0"/>
+            <a:ext cx="12188952" cy="960120"/>
+          </a:xfrm>
+          <a:prstGeom prst="rect">
+            <a:avLst/>
+          </a:prstGeom>
+          <a:solidFill>
+            <a:srgbClr val="1A2F5E"/>
+          </a:solidFill>
+          <a:ln>
+            <a:noFill/>
+          </a:ln>
+        </p:spPr>
+        <p:style>
+          <a:lnRef idx="1">
+            <a:schemeClr val="accent1"/>
+          </a:lnRef>
+          <a:fillRef idx="3">
+            <a:schemeClr val="accent1"/>
+          </a:fillRef>
+          <a:effectRef idx="2">
+            <a:schemeClr val="accent1"/>
+          </a:effectRef>
+          <a:fontRef idx="minor">
+            <a:schemeClr val="lt1"/>
+          </a:fontRef>
+        </p:style>
+        <p:txBody>
+          <a:bodyPr rtlCol="0" anchor="ctr"/>
+          <a:lstStyle/>
+          <a:p>
+            <a:pPr algn="ctr"/>
+          </a:p>
+        </p:txBody>
+      </p:sp>
+      <p:sp>
+        <p:nvSpPr>
+          <p:cNvPr id="3" name="Rectangle 2"/>
+          <p:cNvSpPr/>
+          <p:nvPr/>
+        </p:nvSpPr>
+        <p:spPr>
+          <a:xfrm>
+            <a:off x="0" y="960120"/>
+            <a:ext cx="12188952" cy="36576"/>
+          </a:xfrm>
+          <a:prstGeom prst="rect">
+            <a:avLst/>
+          </a:prstGeom>
+          <a:solidFill>
+            <a:srgbClr val="2E75B6"/>
+          </a:solidFill>
+          <a:ln>
+            <a:noFill/>
+          </a:ln>
+        </p:spPr>
+        <p:style>
+          <a:lnRef idx="1">
+            <a:schemeClr val="accent1"/>
+          </a:lnRef>
+          <a:fillRef idx="3">
+            <a:schemeClr val="accent1"/>
+          </a:fillRef>
+          <a:effectRef idx="2">
+            <a:schemeClr val="accent1"/>
+          </a:effectRef>
+          <a:fontRef idx="minor">
+            <a:schemeClr val="lt1"/>
+          </a:fontRef>
+        </p:style>
+        <p:txBody>
+          <a:bodyPr rtlCol="0" anchor="ctr"/>
+          <a:lstStyle/>
+          <a:p>
+            <a:pPr algn="ctr"/>
+          </a:p>
+        </p:txBody>
+      </p:sp>
+      <p:sp>
+        <p:nvSpPr>
+          <p:cNvPr id="4" name="TextBox 3"/>
+          <p:cNvSpPr txBox="1"/>
+          <p:nvPr/>
+        </p:nvSpPr>
+        <p:spPr>
+          <a:xfrm>
+            <a:off x="320040" y="91440"/>
+            <a:ext cx="8686800" cy="594360"/>
+          </a:xfrm>
+          <a:prstGeom prst="rect">
+            <a:avLst/>
+          </a:prstGeom>
+          <a:noFill/>
+        </p:spPr>
+        <p:txBody>
+          <a:bodyPr wrap="square">
+            <a:spAutoFit/>
+          </a:bodyPr>
+          <a:lstStyle/>
+          <a:p>
+            <a:pPr algn="l"/>
+            <a:r>
+              <a:rPr sz="2600" b="1" i="0">
+                <a:solidFill>
+                  <a:srgbClr val="FFFFFF"/>
+                </a:solidFill>
+                <a:latin typeface="游ゴシック"/>
+              </a:rPr>
+              <a:t>課題2｜スコア分布・成長幅ランキング（学校データ）</a:t>
+            </a:r>
+          </a:p>
+        </p:txBody>
+      </p:sp>
+      <p:sp>
+        <p:nvSpPr>
+          <p:cNvPr id="5" name="TextBox 4"/>
+          <p:cNvSpPr txBox="1"/>
+          <p:nvPr/>
+        </p:nvSpPr>
+        <p:spPr>
+          <a:xfrm>
+            <a:off x="320040" y="612648"/>
+            <a:ext cx="8686800" cy="347472"/>
+          </a:xfrm>
+          <a:prstGeom prst="rect">
+            <a:avLst/>
+          </a:prstGeom>
+          <a:noFill/>
+        </p:spPr>
+        <p:txBody>
+          <a:bodyPr wrap="square">
+            <a:spAutoFit/>
+          </a:bodyPr>
+          <a:lstStyle/>
+          <a:p>
+            <a:pPr algn="l"/>
+            <a:r>
+              <a:rPr sz="1200" b="0" i="0">
+                <a:solidFill>
+                  <a:srgbClr val="D6E4F7"/>
+                </a:solidFill>
+                <a:latin typeface="游ゴシック"/>
+              </a:rPr>
+              <a:t>箱ひげ図（分布）＋横棒グラフ（初日→最終日の変化）</a:t>
+            </a:r>
+          </a:p>
+        </p:txBody>
+      </p:sp>
+      <p:sp>
+        <p:nvSpPr>
+          <p:cNvPr id="6" name="Rectangle 5"/>
+          <p:cNvSpPr/>
+          <p:nvPr/>
+        </p:nvSpPr>
+        <p:spPr>
+          <a:xfrm>
+            <a:off x="0" y="6565392"/>
+            <a:ext cx="12188952" cy="292608"/>
+          </a:xfrm>
+          <a:prstGeom prst="rect">
+            <a:avLst/>
+          </a:prstGeom>
+          <a:solidFill>
+            <a:srgbClr val="1A2F5E"/>
+          </a:solidFill>
+          <a:ln>
+            <a:noFill/>
+          </a:ln>
+        </p:spPr>
+        <p:style>
+          <a:lnRef idx="1">
+            <a:schemeClr val="accent1"/>
+          </a:lnRef>
+          <a:fillRef idx="3">
+            <a:schemeClr val="accent1"/>
+          </a:fillRef>
+          <a:effectRef idx="2">
+            <a:schemeClr val="accent1"/>
+          </a:effectRef>
+          <a:fontRef idx="minor">
+            <a:schemeClr val="lt1"/>
+          </a:fontRef>
+        </p:style>
+        <p:txBody>
+          <a:bodyPr rtlCol="0" anchor="ctr"/>
+          <a:lstStyle/>
+          <a:p>
+            <a:pPr algn="ctr"/>
+          </a:p>
+        </p:txBody>
+      </p:sp>
+      <p:pic>
+        <p:nvPicPr>
+          <p:cNvPr id="7" name="Picture 6" descr="graph6_boxplot_growth.png"/>
+          <p:cNvPicPr>
+            <a:picLocks noChangeAspect="1"/>
+          </p:cNvPicPr>
+          <p:nvPr/>
+        </p:nvPicPr>
+        <p:blipFill>
+          <a:blip r:embed="rId2"/>
+          <a:stretch>
+            <a:fillRect/>
+          </a:stretch>
+        </p:blipFill>
+        <p:spPr>
+          <a:xfrm>
+            <a:off x="274320" y="1051560"/>
+            <a:ext cx="11612880" cy="5349240"/>
+          </a:xfrm>
+          <a:prstGeom prst="rect">
+            <a:avLst/>
+          </a:prstGeom>
+        </p:spPr>
+      </p:pic>
+    </p:spTree>
+  </p:cSld>
+  <p:clrMapOvr>
+    <a:masterClrMapping/>
+  </p:clrMapOvr>
+</p:sld>
+</file>
+
+<file path=ppt/slides/slide12.xml><?xml version="1.0" encoding="utf-8"?>
+<p:sld xmlns:a="http://schemas.openxmlformats.org/drawingml/2006/main" xmlns:p="http://schemas.openxmlformats.org/presentationml/2006/main" xmlns:r="http://schemas.openxmlformats.org/officeDocument/2006/relationships">
+  <p:cSld>
+    <p:bg>
+      <p:bgPr>
+        <a:solidFill>
+          <a:srgbClr val="FFFFFF"/>
+        </a:solidFill>
+        <a:effectLst/>
+      </p:bgPr>
+    </p:bg>
+    <p:spTree>
+      <p:nvGrpSpPr>
+        <p:cNvPr id="1" name=""/>
+        <p:cNvGrpSpPr/>
+        <p:nvPr/>
+      </p:nvGrpSpPr>
+      <p:grpSpPr/>
+      <p:sp>
+        <p:nvSpPr>
+          <p:cNvPr id="2" name="Rectangle 1"/>
+          <p:cNvSpPr/>
+          <p:nvPr/>
+        </p:nvSpPr>
+        <p:spPr>
+          <a:xfrm>
+            <a:off x="0" y="0"/>
+            <a:ext cx="12188952" cy="960120"/>
+          </a:xfrm>
+          <a:prstGeom prst="rect">
+            <a:avLst/>
+          </a:prstGeom>
+          <a:solidFill>
+            <a:srgbClr val="1A2F5E"/>
+          </a:solidFill>
+          <a:ln>
+            <a:noFill/>
+          </a:ln>
+        </p:spPr>
+        <p:style>
+          <a:lnRef idx="1">
+            <a:schemeClr val="accent1"/>
+          </a:lnRef>
+          <a:fillRef idx="3">
+            <a:schemeClr val="accent1"/>
+          </a:fillRef>
+          <a:effectRef idx="2">
+            <a:schemeClr val="accent1"/>
+          </a:effectRef>
+          <a:fontRef idx="minor">
+            <a:schemeClr val="lt1"/>
+          </a:fontRef>
+        </p:style>
+        <p:txBody>
+          <a:bodyPr rtlCol="0" anchor="ctr"/>
+          <a:lstStyle/>
+          <a:p>
+            <a:pPr algn="ctr"/>
+          </a:p>
+        </p:txBody>
+      </p:sp>
+      <p:sp>
+        <p:nvSpPr>
+          <p:cNvPr id="3" name="Rectangle 2"/>
+          <p:cNvSpPr/>
+          <p:nvPr/>
+        </p:nvSpPr>
+        <p:spPr>
+          <a:xfrm>
+            <a:off x="0" y="960120"/>
+            <a:ext cx="12188952" cy="36576"/>
+          </a:xfrm>
+          <a:prstGeom prst="rect">
+            <a:avLst/>
+          </a:prstGeom>
+          <a:solidFill>
+            <a:srgbClr val="2E75B6"/>
+          </a:solidFill>
+          <a:ln>
+            <a:noFill/>
+          </a:ln>
+        </p:spPr>
+        <p:style>
+          <a:lnRef idx="1">
+            <a:schemeClr val="accent1"/>
+          </a:lnRef>
+          <a:fillRef idx="3">
+            <a:schemeClr val="accent1"/>
+          </a:fillRef>
+          <a:effectRef idx="2">
+            <a:schemeClr val="accent1"/>
+          </a:effectRef>
+          <a:fontRef idx="minor">
+            <a:schemeClr val="lt1"/>
+          </a:fontRef>
+        </p:style>
+        <p:txBody>
+          <a:bodyPr rtlCol="0" anchor="ctr"/>
+          <a:lstStyle/>
+          <a:p>
+            <a:pPr algn="ctr"/>
+          </a:p>
+        </p:txBody>
+      </p:sp>
+      <p:sp>
+        <p:nvSpPr>
+          <p:cNvPr id="4" name="TextBox 3"/>
+          <p:cNvSpPr txBox="1"/>
+          <p:nvPr/>
+        </p:nvSpPr>
+        <p:spPr>
+          <a:xfrm>
+            <a:off x="320040" y="91440"/>
+            <a:ext cx="8686800" cy="594360"/>
+          </a:xfrm>
+          <a:prstGeom prst="rect">
+            <a:avLst/>
+          </a:prstGeom>
+          <a:noFill/>
+        </p:spPr>
+        <p:txBody>
+          <a:bodyPr wrap="square">
+            <a:spAutoFit/>
+          </a:bodyPr>
+          <a:lstStyle/>
+          <a:p>
+            <a:pPr algn="l"/>
+            <a:r>
+              <a:rPr sz="2600" b="1" i="0">
+                <a:solidFill>
+                  <a:srgbClr val="FFFFFF"/>
+                </a:solidFill>
+                <a:latin typeface="游ゴシック"/>
+              </a:rPr>
+              <a:t>課題2｜受講者別パフォーマンス詳細（学校データ）</a:t>
             </a:r>
           </a:p>
         </p:txBody>
@@ -4568,7 +5500,7 @@
 </p:sld>
 </file>
 
-<file path=ppt/slides/slide11.xml><?xml version="1.0" encoding="utf-8"?>
+<file path=ppt/slides/slide13.xml><?xml version="1.0" encoding="utf-8"?>
 <p:sld xmlns:a="http://schemas.openxmlformats.org/drawingml/2006/main" xmlns:p="http://schemas.openxmlformats.org/presentationml/2006/main" xmlns:r="http://schemas.openxmlformats.org/officeDocument/2006/relationships">
   <p:cSld>
     <p:bg>
@@ -6038,7 +6970,7 @@
                 </a:solidFill>
                 <a:latin typeface="游ゴシック"/>
               </a:rPr>
-              <a:t>分析対象者数（課題3）</a:t>
+              <a:t>分析対象者数（課題3・会社）</a:t>
             </a:r>
           </a:p>
         </p:txBody>
@@ -6151,7 +7083,7 @@
                 </a:solidFill>
                 <a:latin typeface="游ゴシック"/>
               </a:rPr>
-              <a:t>全体平均スコア（課題3）</a:t>
+              <a:t>全体平均スコア（課題3・会社）</a:t>
             </a:r>
           </a:p>
         </p:txBody>
@@ -6264,7 +7196,7 @@
                 </a:solidFill>
                 <a:latin typeface="游ゴシック"/>
               </a:rPr>
-              <a:t>分析対象者数（課題2）</a:t>
+              <a:t>分析対象者数（課題2・学校）</a:t>
             </a:r>
           </a:p>
         </p:txBody>
@@ -6564,7 +7496,7 @@
                 </a:solidFill>
                 <a:latin typeface="游ゴシック"/>
               </a:rPr>
-              <a:t>【課題3：所属別パフォーマンス】</a:t>
+              <a:t>【課題3：会社データ｜所属別パフォーマンス】</a:t>
             </a:r>
           </a:p>
           <a:p>
@@ -6676,7 +7608,7 @@
                 </a:solidFill>
                 <a:latin typeface="游ゴシック"/>
               </a:rPr>
-              <a:t>【課題2：個人別スコア推移】</a:t>
+              <a:t>【課題2：学校データ｜科目別スコア推移】</a:t>
             </a:r>
           </a:p>
           <a:p>
@@ -6759,7 +7691,7 @@
     <p:bg>
       <p:bgPr>
         <a:solidFill>
-          <a:srgbClr val="FFFFFF"/>
+          <a:srgbClr val="1A2F5E"/>
         </a:solidFill>
         <a:effectLst/>
       </p:bgPr>
@@ -6779,51 +7711,8 @@
         </p:nvSpPr>
         <p:spPr>
           <a:xfrm>
-            <a:off x="0" y="0"/>
-            <a:ext cx="12188952" cy="960120"/>
-          </a:xfrm>
-          <a:prstGeom prst="rect">
-            <a:avLst/>
-          </a:prstGeom>
-          <a:solidFill>
-            <a:srgbClr val="1A2F5E"/>
-          </a:solidFill>
-          <a:ln>
-            <a:noFill/>
-          </a:ln>
-        </p:spPr>
-        <p:style>
-          <a:lnRef idx="1">
-            <a:schemeClr val="accent1"/>
-          </a:lnRef>
-          <a:fillRef idx="3">
-            <a:schemeClr val="accent1"/>
-          </a:fillRef>
-          <a:effectRef idx="2">
-            <a:schemeClr val="accent1"/>
-          </a:effectRef>
-          <a:fontRef idx="minor">
-            <a:schemeClr val="lt1"/>
-          </a:fontRef>
-        </p:style>
-        <p:txBody>
-          <a:bodyPr rtlCol="0" anchor="ctr"/>
-          <a:lstStyle/>
-          <a:p>
-            <a:pPr algn="ctr"/>
-          </a:p>
-        </p:txBody>
-      </p:sp>
-      <p:sp>
-        <p:nvSpPr>
-          <p:cNvPr id="3" name="Rectangle 2"/>
-          <p:cNvSpPr/>
-          <p:nvPr/>
-        </p:nvSpPr>
-        <p:spPr>
-          <a:xfrm>
-            <a:off x="0" y="960120"/>
-            <a:ext cx="12188952" cy="36576"/>
+            <a:off x="0" y="2560320"/>
+            <a:ext cx="12188952" cy="2011680"/>
           </a:xfrm>
           <a:prstGeom prst="rect">
             <a:avLst/>
@@ -6859,90 +7748,20 @@
       </p:sp>
       <p:sp>
         <p:nvSpPr>
-          <p:cNvPr id="4" name="TextBox 3"/>
-          <p:cNvSpPr txBox="1"/>
-          <p:nvPr/>
-        </p:nvSpPr>
-        <p:spPr>
-          <a:xfrm>
-            <a:off x="320040" y="91440"/>
-            <a:ext cx="8686800" cy="594360"/>
-          </a:xfrm>
-          <a:prstGeom prst="rect">
-            <a:avLst/>
-          </a:prstGeom>
-          <a:noFill/>
-        </p:spPr>
-        <p:txBody>
-          <a:bodyPr wrap="square">
-            <a:spAutoFit/>
-          </a:bodyPr>
-          <a:lstStyle/>
-          <a:p>
-            <a:pPr algn="l"/>
-            <a:r>
-              <a:rPr sz="2600" b="1" i="0">
-                <a:solidFill>
-                  <a:srgbClr val="FFFFFF"/>
-                </a:solidFill>
-                <a:latin typeface="游ゴシック"/>
-              </a:rPr>
-              <a:t>課題3｜所属別参加者数</a:t>
-            </a:r>
-          </a:p>
-        </p:txBody>
-      </p:sp>
-      <p:sp>
-        <p:nvSpPr>
-          <p:cNvPr id="5" name="TextBox 4"/>
-          <p:cNvSpPr txBox="1"/>
-          <p:nvPr/>
-        </p:nvSpPr>
-        <p:spPr>
-          <a:xfrm>
-            <a:off x="320040" y="612648"/>
-            <a:ext cx="8686800" cy="347472"/>
-          </a:xfrm>
-          <a:prstGeom prst="rect">
-            <a:avLst/>
-          </a:prstGeom>
-          <a:noFill/>
-        </p:spPr>
-        <p:txBody>
-          <a:bodyPr wrap="square">
-            <a:spAutoFit/>
-          </a:bodyPr>
-          <a:lstStyle/>
-          <a:p>
-            <a:pPr algn="l"/>
-            <a:r>
-              <a:rPr sz="1200" b="0" i="0">
-                <a:solidFill>
-                  <a:srgbClr val="D6E4F7"/>
-                </a:solidFill>
-                <a:latin typeface="游ゴシック"/>
-              </a:rPr>
-              <a:t>ドーナツ型円グラフ</a:t>
-            </a:r>
-          </a:p>
-        </p:txBody>
-      </p:sp>
-      <p:sp>
-        <p:nvSpPr>
-          <p:cNvPr id="6" name="Rectangle 5"/>
+          <p:cNvPr id="3" name="Rectangle 2"/>
           <p:cNvSpPr/>
           <p:nvPr/>
         </p:nvSpPr>
         <p:spPr>
           <a:xfrm>
-            <a:off x="0" y="6565392"/>
-            <a:ext cx="12188952" cy="292608"/>
+            <a:off x="0" y="2560320"/>
+            <a:ext cx="274320" cy="2011680"/>
           </a:xfrm>
           <a:prstGeom prst="rect">
             <a:avLst/>
           </a:prstGeom>
           <a:solidFill>
-            <a:srgbClr val="1A2F5E"/>
+            <a:srgbClr val="FFC000"/>
           </a:solidFill>
           <a:ln>
             <a:noFill/>
@@ -6970,46 +7789,127 @@
           </a:p>
         </p:txBody>
       </p:sp>
-      <p:pic>
-        <p:nvPicPr>
-          <p:cNvPr id="7" name="Picture 6" descr="graph1_pie.png"/>
-          <p:cNvPicPr>
-            <a:picLocks noChangeAspect="1"/>
-          </p:cNvPicPr>
-          <p:nvPr/>
-        </p:nvPicPr>
-        <p:blipFill>
-          <a:blip r:embed="rId2"/>
-          <a:stretch>
-            <a:fillRect/>
-          </a:stretch>
-        </p:blipFill>
-        <p:spPr>
-          <a:xfrm>
-            <a:off x="274320" y="1051560"/>
-            <a:ext cx="7315200" cy="5349240"/>
-          </a:xfrm>
-          <a:prstGeom prst="rect">
-            <a:avLst/>
-          </a:prstGeom>
-        </p:spPr>
-      </p:pic>
-      <p:sp>
-        <p:nvSpPr>
-          <p:cNvPr id="8" name="Rectangle 7"/>
+      <p:sp>
+        <p:nvSpPr>
+          <p:cNvPr id="4" name="TextBox 3"/>
+          <p:cNvSpPr txBox="1"/>
+          <p:nvPr/>
+        </p:nvSpPr>
+        <p:spPr>
+          <a:xfrm>
+            <a:off x="548640" y="2606040"/>
+            <a:ext cx="10972800" cy="502920"/>
+          </a:xfrm>
+          <a:prstGeom prst="rect">
+            <a:avLst/>
+          </a:prstGeom>
+          <a:noFill/>
+        </p:spPr>
+        <p:txBody>
+          <a:bodyPr wrap="square">
+            <a:spAutoFit/>
+          </a:bodyPr>
+          <a:lstStyle/>
+          <a:p>
+            <a:pPr algn="l"/>
+            <a:r>
+              <a:rPr sz="1800" b="0" i="0">
+                <a:solidFill>
+                  <a:srgbClr val="D6E4F7"/>
+                </a:solidFill>
+                <a:latin typeface="游ゴシック"/>
+              </a:rPr>
+              <a:t>課題３</a:t>
+            </a:r>
+          </a:p>
+        </p:txBody>
+      </p:sp>
+      <p:sp>
+        <p:nvSpPr>
+          <p:cNvPr id="5" name="TextBox 4"/>
+          <p:cNvSpPr txBox="1"/>
+          <p:nvPr/>
+        </p:nvSpPr>
+        <p:spPr>
+          <a:xfrm>
+            <a:off x="548640" y="3017520"/>
+            <a:ext cx="10972800" cy="822960"/>
+          </a:xfrm>
+          <a:prstGeom prst="rect">
+            <a:avLst/>
+          </a:prstGeom>
+          <a:noFill/>
+        </p:spPr>
+        <p:txBody>
+          <a:bodyPr wrap="square">
+            <a:spAutoFit/>
+          </a:bodyPr>
+          <a:lstStyle/>
+          <a:p>
+            <a:pPr algn="l"/>
+            <a:r>
+              <a:rPr sz="3400" b="1" i="0">
+                <a:solidFill>
+                  <a:srgbClr val="FFFFFF"/>
+                </a:solidFill>
+                <a:latin typeface="游ゴシック"/>
+              </a:rPr>
+              <a:t>会社データ｜所属別パフォーマンス分析</a:t>
+            </a:r>
+          </a:p>
+        </p:txBody>
+      </p:sp>
+      <p:sp>
+        <p:nvSpPr>
+          <p:cNvPr id="6" name="TextBox 5"/>
+          <p:cNvSpPr txBox="1"/>
+          <p:nvPr/>
+        </p:nvSpPr>
+        <p:spPr>
+          <a:xfrm>
+            <a:off x="548640" y="3886200"/>
+            <a:ext cx="10972800" cy="502920"/>
+          </a:xfrm>
+          <a:prstGeom prst="rect">
+            <a:avLst/>
+          </a:prstGeom>
+          <a:noFill/>
+        </p:spPr>
+        <p:txBody>
+          <a:bodyPr wrap="square">
+            <a:spAutoFit/>
+          </a:bodyPr>
+          <a:lstStyle/>
+          <a:p>
+            <a:pPr algn="l"/>
+            <a:r>
+              <a:rPr sz="1500" b="0" i="0">
+                <a:solidFill>
+                  <a:srgbClr val="D6E4F7"/>
+                </a:solidFill>
+                <a:latin typeface="游ゴシック"/>
+              </a:rPr>
+              <a:t>部門ごとのスコア分布・強み・課題・リスクを可視化する</a:t>
+            </a:r>
+          </a:p>
+        </p:txBody>
+      </p:sp>
+      <p:sp>
+        <p:nvSpPr>
+          <p:cNvPr id="7" name="Rectangle 6"/>
           <p:cNvSpPr/>
           <p:nvPr/>
         </p:nvSpPr>
         <p:spPr>
           <a:xfrm>
-            <a:off x="7772400" y="1051560"/>
-            <a:ext cx="4160520" cy="5349240"/>
+            <a:off x="0" y="6217920"/>
+            <a:ext cx="12188952" cy="640080"/>
           </a:xfrm>
           <a:prstGeom prst="rect">
             <a:avLst/>
           </a:prstGeom>
           <a:solidFill>
-            <a:srgbClr val="F5F5F5"/>
+            <a:srgbClr val="0F1E42"/>
           </a:solidFill>
           <a:ln>
             <a:noFill/>
@@ -7034,331 +7934,6 @@
           <a:lstStyle/>
           <a:p>
             <a:pPr algn="ctr"/>
-          </a:p>
-        </p:txBody>
-      </p:sp>
-      <p:sp>
-        <p:nvSpPr>
-          <p:cNvPr id="9" name="Rectangle 8"/>
-          <p:cNvSpPr/>
-          <p:nvPr/>
-        </p:nvSpPr>
-        <p:spPr>
-          <a:xfrm>
-            <a:off x="7772400" y="1051560"/>
-            <a:ext cx="64008" cy="5349240"/>
-          </a:xfrm>
-          <a:prstGeom prst="rect">
-            <a:avLst/>
-          </a:prstGeom>
-          <a:solidFill>
-            <a:srgbClr val="2E75B6"/>
-          </a:solidFill>
-          <a:ln>
-            <a:noFill/>
-          </a:ln>
-        </p:spPr>
-        <p:style>
-          <a:lnRef idx="1">
-            <a:schemeClr val="accent1"/>
-          </a:lnRef>
-          <a:fillRef idx="3">
-            <a:schemeClr val="accent1"/>
-          </a:fillRef>
-          <a:effectRef idx="2">
-            <a:schemeClr val="accent1"/>
-          </a:effectRef>
-          <a:fontRef idx="minor">
-            <a:schemeClr val="lt1"/>
-          </a:fontRef>
-        </p:style>
-        <p:txBody>
-          <a:bodyPr rtlCol="0" anchor="ctr"/>
-          <a:lstStyle/>
-          <a:p>
-            <a:pPr algn="ctr"/>
-          </a:p>
-        </p:txBody>
-      </p:sp>
-      <p:sp>
-        <p:nvSpPr>
-          <p:cNvPr id="10" name="TextBox 9"/>
-          <p:cNvSpPr txBox="1"/>
-          <p:nvPr/>
-        </p:nvSpPr>
-        <p:spPr>
-          <a:xfrm>
-            <a:off x="7936992" y="1143000"/>
-            <a:ext cx="3931920" cy="365760"/>
-          </a:xfrm>
-          <a:prstGeom prst="rect">
-            <a:avLst/>
-          </a:prstGeom>
-          <a:noFill/>
-        </p:spPr>
-        <p:txBody>
-          <a:bodyPr wrap="square">
-            <a:spAutoFit/>
-          </a:bodyPr>
-          <a:lstStyle/>
-          <a:p>
-            <a:pPr algn="l"/>
-            <a:r>
-              <a:rPr sz="1300" b="1" i="0">
-                <a:solidFill>
-                  <a:srgbClr val="2E75B6"/>
-                </a:solidFill>
-                <a:latin typeface="游ゴシック"/>
-              </a:rPr>
-              <a:t>グラフの読み方・ポイント</a:t>
-            </a:r>
-          </a:p>
-        </p:txBody>
-      </p:sp>
-      <p:sp>
-        <p:nvSpPr>
-          <p:cNvPr id="11" name="TextBox 10"/>
-          <p:cNvSpPr txBox="1"/>
-          <p:nvPr/>
-        </p:nvSpPr>
-        <p:spPr>
-          <a:xfrm>
-            <a:off x="7936992" y="1554480"/>
-            <a:ext cx="3886200" cy="4754879"/>
-          </a:xfrm>
-          <a:prstGeom prst="rect">
-            <a:avLst/>
-          </a:prstGeom>
-          <a:noFill/>
-        </p:spPr>
-        <p:txBody>
-          <a:bodyPr wrap="square">
-            <a:spAutoFit/>
-          </a:bodyPr>
-          <a:lstStyle/>
-          <a:p>
-            <a:pPr algn="l">
-              <a:spcAft>
-                <a:spcPts val="300"/>
-              </a:spcAft>
-            </a:pPr>
-            <a:r>
-              <a:rPr sz="1200" b="0">
-                <a:solidFill>
-                  <a:srgbClr val="444444"/>
-                </a:solidFill>
-                <a:latin typeface="游ゴシック"/>
-              </a:rPr>
-              <a:t>■ 参加者構成</a:t>
-            </a:r>
-          </a:p>
-          <a:p>
-            <a:pPr algn="l">
-              <a:spcAft>
-                <a:spcPts val="300"/>
-              </a:spcAft>
-            </a:pPr>
-            <a:r>
-              <a:rPr sz="1200" b="0">
-                <a:solidFill>
-                  <a:srgbClr val="444444"/>
-                </a:solidFill>
-                <a:latin typeface="游ゴシック"/>
-              </a:rPr>
-              <a:t>  営業・開発がそれぞれ10名（各29%）</a:t>
-            </a:r>
-          </a:p>
-          <a:p>
-            <a:pPr algn="l">
-              <a:spcAft>
-                <a:spcPts val="300"/>
-              </a:spcAft>
-            </a:pPr>
-            <a:r>
-              <a:rPr sz="1200" b="0">
-                <a:solidFill>
-                  <a:srgbClr val="444444"/>
-                </a:solidFill>
-                <a:latin typeface="游ゴシック"/>
-              </a:rPr>
-              <a:t>  管理8名（23%）、人事7名（20%）</a:t>
-            </a:r>
-          </a:p>
-          <a:p>
-            <a:pPr algn="l">
-              <a:spcAft>
-                <a:spcPts val="300"/>
-              </a:spcAft>
-            </a:pPr>
-            <a:r>
-              <a:rPr sz="1200" b="0">
-                <a:solidFill>
-                  <a:srgbClr val="444444"/>
-                </a:solidFill>
-                <a:latin typeface="游ゴシック"/>
-              </a:rPr>
-              <a:t/>
-            </a:r>
-          </a:p>
-          <a:p>
-            <a:pPr algn="l">
-              <a:spcAft>
-                <a:spcPts val="300"/>
-              </a:spcAft>
-            </a:pPr>
-            <a:r>
-              <a:rPr sz="1200" b="0">
-                <a:solidFill>
-                  <a:srgbClr val="444444"/>
-                </a:solidFill>
-                <a:latin typeface="游ゴシック"/>
-              </a:rPr>
-              <a:t>■ 注目点</a:t>
-            </a:r>
-          </a:p>
-          <a:p>
-            <a:pPr algn="l">
-              <a:spcAft>
-                <a:spcPts val="300"/>
-              </a:spcAft>
-            </a:pPr>
-            <a:r>
-              <a:rPr sz="1200" b="0">
-                <a:solidFill>
-                  <a:srgbClr val="444444"/>
-                </a:solidFill>
-                <a:latin typeface="游ゴシック"/>
-              </a:rPr>
-              <a:t>  営業・開発で全体の約6割を占める。</a:t>
-            </a:r>
-          </a:p>
-          <a:p>
-            <a:pPr algn="l">
-              <a:spcAft>
-                <a:spcPts val="300"/>
-              </a:spcAft>
-            </a:pPr>
-            <a:r>
-              <a:rPr sz="1200" b="0">
-                <a:solidFill>
-                  <a:srgbClr val="444444"/>
-                </a:solidFill>
-                <a:latin typeface="游ゴシック"/>
-              </a:rPr>
-              <a:t>  この2部門のパフォーマンスが</a:t>
-            </a:r>
-          </a:p>
-          <a:p>
-            <a:pPr algn="l">
-              <a:spcAft>
-                <a:spcPts val="300"/>
-              </a:spcAft>
-            </a:pPr>
-            <a:r>
-              <a:rPr sz="1200" b="0">
-                <a:solidFill>
-                  <a:srgbClr val="444444"/>
-                </a:solidFill>
-                <a:latin typeface="游ゴシック"/>
-              </a:rPr>
-              <a:t>  組織全体の数値を大きく左右する。</a:t>
-            </a:r>
-          </a:p>
-          <a:p>
-            <a:pPr algn="l">
-              <a:spcAft>
-                <a:spcPts val="300"/>
-              </a:spcAft>
-            </a:pPr>
-            <a:r>
-              <a:rPr sz="1200" b="0">
-                <a:solidFill>
-                  <a:srgbClr val="444444"/>
-                </a:solidFill>
-                <a:latin typeface="游ゴシック"/>
-              </a:rPr>
-              <a:t/>
-            </a:r>
-          </a:p>
-          <a:p>
-            <a:pPr algn="l">
-              <a:spcAft>
-                <a:spcPts val="300"/>
-              </a:spcAft>
-            </a:pPr>
-            <a:r>
-              <a:rPr sz="1200" b="0">
-                <a:solidFill>
-                  <a:srgbClr val="444444"/>
-                </a:solidFill>
-                <a:latin typeface="游ゴシック"/>
-              </a:rPr>
-              <a:t>■ マーケティング示唆</a:t>
-            </a:r>
-          </a:p>
-          <a:p>
-            <a:pPr algn="l">
-              <a:spcAft>
-                <a:spcPts val="300"/>
-              </a:spcAft>
-            </a:pPr>
-            <a:r>
-              <a:rPr sz="1200" b="0">
-                <a:solidFill>
-                  <a:srgbClr val="444444"/>
-                </a:solidFill>
-                <a:latin typeface="游ゴシック"/>
-              </a:rPr>
-              <a:t>  人事は参加者数も最少（7名）。</a:t>
-            </a:r>
-          </a:p>
-          <a:p>
-            <a:pPr algn="l">
-              <a:spcAft>
-                <a:spcPts val="300"/>
-              </a:spcAft>
-            </a:pPr>
-            <a:r>
-              <a:rPr sz="1200" b="0">
-                <a:solidFill>
-                  <a:srgbClr val="444444"/>
-                </a:solidFill>
-                <a:latin typeface="游ゴシック"/>
-              </a:rPr>
-              <a:t>  少人数で均質な低スコアという</a:t>
-            </a:r>
-          </a:p>
-          <a:p>
-            <a:pPr algn="l">
-              <a:spcAft>
-                <a:spcPts val="300"/>
-              </a:spcAft>
-            </a:pPr>
-            <a:r>
-              <a:rPr sz="1200" b="0">
-                <a:solidFill>
-                  <a:srgbClr val="444444"/>
-                </a:solidFill>
-                <a:latin typeface="游ゴシック"/>
-              </a:rPr>
-              <a:t>  構造は、集団研修より個別介入が</a:t>
-            </a:r>
-          </a:p>
-          <a:p>
-            <a:pPr algn="l">
-              <a:spcAft>
-                <a:spcPts val="300"/>
-              </a:spcAft>
-            </a:pPr>
-            <a:r>
-              <a:rPr sz="1200" b="0">
-                <a:solidFill>
-                  <a:srgbClr val="444444"/>
-                </a:solidFill>
-                <a:latin typeface="游ゴシック"/>
-              </a:rPr>
-              <a:t>  効果的であることを示唆する。</a:t>
-            </a:r>
           </a:p>
         </p:txBody>
       </p:sp>
@@ -7504,7 +8079,7 @@
                 </a:solidFill>
                 <a:latin typeface="游ゴシック"/>
               </a:rPr>
-              <a:t>課題3｜所属別スコア比較</a:t>
+              <a:t>課題3｜所属別参加者数（会社データ）</a:t>
             </a:r>
           </a:p>
         </p:txBody>
@@ -7539,7 +8114,7 @@
                 </a:solidFill>
                 <a:latin typeface="游ゴシック"/>
               </a:rPr>
-              <a:t>平均・最高・最低 グループ棒グラフ</a:t>
+              <a:t>ドーナツ型円グラフ</a:t>
             </a:r>
           </a:p>
         </p:txBody>
@@ -7589,7 +8164,7 @@
       </p:sp>
       <p:pic>
         <p:nvPicPr>
-          <p:cNvPr id="7" name="Picture 6" descr="graph2_bar.png"/>
+          <p:cNvPr id="7" name="Picture 6" descr="graph1_pie.png"/>
           <p:cNvPicPr>
             <a:picLocks noChangeAspect="1"/>
           </p:cNvPicPr>
@@ -7727,7 +8302,7 @@
                 </a:solidFill>
                 <a:latin typeface="游ゴシック"/>
               </a:rPr>
-              <a:t>スコア比較の着眼点</a:t>
+              <a:t>グラフの読み方・ポイント</a:t>
             </a:r>
           </a:p>
         </p:txBody>
@@ -7766,71 +8341,39 @@
                 </a:solidFill>
                 <a:latin typeface="游ゴシック"/>
               </a:rPr>
-              <a:t>■ 部門別ランキング（平均）</a:t>
-            </a:r>
-          </a:p>
-          <a:p>
-            <a:pPr algn="l">
-              <a:spcAft>
-                <a:spcPts val="300"/>
-              </a:spcAft>
-            </a:pPr>
-            <a:r>
-              <a:rPr sz="1200" b="0">
-                <a:solidFill>
-                  <a:srgbClr val="444444"/>
-                </a:solidFill>
-                <a:latin typeface="游ゴシック"/>
-              </a:rPr>
-              <a:t>  1位 開発   88.9点</a:t>
-            </a:r>
-          </a:p>
-          <a:p>
-            <a:pPr algn="l">
-              <a:spcAft>
-                <a:spcPts val="300"/>
-              </a:spcAft>
-            </a:pPr>
-            <a:r>
-              <a:rPr sz="1200" b="0">
-                <a:solidFill>
-                  <a:srgbClr val="444444"/>
-                </a:solidFill>
-                <a:latin typeface="游ゴシック"/>
-              </a:rPr>
-              <a:t>  2位 管理   87.1点</a:t>
-            </a:r>
-          </a:p>
-          <a:p>
-            <a:pPr algn="l">
-              <a:spcAft>
-                <a:spcPts val="300"/>
-              </a:spcAft>
-            </a:pPr>
-            <a:r>
-              <a:rPr sz="1200" b="0">
-                <a:solidFill>
-                  <a:srgbClr val="444444"/>
-                </a:solidFill>
-                <a:latin typeface="游ゴシック"/>
-              </a:rPr>
-              <a:t>  3位 営業   83.0点</a:t>
-            </a:r>
-          </a:p>
-          <a:p>
-            <a:pPr algn="l">
-              <a:spcAft>
-                <a:spcPts val="300"/>
-              </a:spcAft>
-            </a:pPr>
-            <a:r>
-              <a:rPr sz="1200" b="0">
-                <a:solidFill>
-                  <a:srgbClr val="444444"/>
-                </a:solidFill>
-                <a:latin typeface="游ゴシック"/>
-              </a:rPr>
-              <a:t>  4位 人事   79.3点</a:t>
+              <a:t>■ 参加者構成</a:t>
+            </a:r>
+          </a:p>
+          <a:p>
+            <a:pPr algn="l">
+              <a:spcAft>
+                <a:spcPts val="300"/>
+              </a:spcAft>
+            </a:pPr>
+            <a:r>
+              <a:rPr sz="1200" b="0">
+                <a:solidFill>
+                  <a:srgbClr val="444444"/>
+                </a:solidFill>
+                <a:latin typeface="游ゴシック"/>
+              </a:rPr>
+              <a:t>  営業・開発がそれぞれ10名（各29%）</a:t>
+            </a:r>
+          </a:p>
+          <a:p>
+            <a:pPr algn="l">
+              <a:spcAft>
+                <a:spcPts val="300"/>
+              </a:spcAft>
+            </a:pPr>
+            <a:r>
+              <a:rPr sz="1200" b="0">
+                <a:solidFill>
+                  <a:srgbClr val="444444"/>
+                </a:solidFill>
+                <a:latin typeface="游ゴシック"/>
+              </a:rPr>
+              <a:t>  管理8名（23%）、人事7名（20%）</a:t>
             </a:r>
           </a:p>
           <a:p>
@@ -7862,55 +8405,55 @@
                 </a:solidFill>
                 <a:latin typeface="游ゴシック"/>
               </a:rPr>
-              <a:t>■ 安定性（最高〜最低の差）</a:t>
-            </a:r>
-          </a:p>
-          <a:p>
-            <a:pPr algn="l">
-              <a:spcAft>
-                <a:spcPts val="300"/>
-              </a:spcAft>
-            </a:pPr>
-            <a:r>
-              <a:rPr sz="1200" b="0">
-                <a:solidFill>
-                  <a:srgbClr val="444444"/>
-                </a:solidFill>
-                <a:latin typeface="游ゴシック"/>
-              </a:rPr>
-              <a:t>  開発：94-82 ＝ 12点差（安定）</a:t>
-            </a:r>
-          </a:p>
-          <a:p>
-            <a:pPr algn="l">
-              <a:spcAft>
-                <a:spcPts val="300"/>
-              </a:spcAft>
-            </a:pPr>
-            <a:r>
-              <a:rPr sz="1200" b="0">
-                <a:solidFill>
-                  <a:srgbClr val="444444"/>
-                </a:solidFill>
-                <a:latin typeface="游ゴシック"/>
-              </a:rPr>
-              <a:t>  営業：93-70 ＝ 23点差（不安定）</a:t>
-            </a:r>
-          </a:p>
-          <a:p>
-            <a:pPr algn="l">
-              <a:spcAft>
-                <a:spcPts val="300"/>
-              </a:spcAft>
-            </a:pPr>
-            <a:r>
-              <a:rPr sz="1200" b="0">
-                <a:solidFill>
-                  <a:srgbClr val="444444"/>
-                </a:solidFill>
-                <a:latin typeface="游ゴシック"/>
-              </a:rPr>
-              <a:t>  人事：82-75 ＝  7点差（均質低）</a:t>
+              <a:t>■ 注目点</a:t>
+            </a:r>
+          </a:p>
+          <a:p>
+            <a:pPr algn="l">
+              <a:spcAft>
+                <a:spcPts val="300"/>
+              </a:spcAft>
+            </a:pPr>
+            <a:r>
+              <a:rPr sz="1200" b="0">
+                <a:solidFill>
+                  <a:srgbClr val="444444"/>
+                </a:solidFill>
+                <a:latin typeface="游ゴシック"/>
+              </a:rPr>
+              <a:t>  営業・開発で全体の約6割を占める。</a:t>
+            </a:r>
+          </a:p>
+          <a:p>
+            <a:pPr algn="l">
+              <a:spcAft>
+                <a:spcPts val="300"/>
+              </a:spcAft>
+            </a:pPr>
+            <a:r>
+              <a:rPr sz="1200" b="0">
+                <a:solidFill>
+                  <a:srgbClr val="444444"/>
+                </a:solidFill>
+                <a:latin typeface="游ゴシック"/>
+              </a:rPr>
+              <a:t>  この2部門のパフォーマンスが</a:t>
+            </a:r>
+          </a:p>
+          <a:p>
+            <a:pPr algn="l">
+              <a:spcAft>
+                <a:spcPts val="300"/>
+              </a:spcAft>
+            </a:pPr>
+            <a:r>
+              <a:rPr sz="1200" b="0">
+                <a:solidFill>
+                  <a:srgbClr val="444444"/>
+                </a:solidFill>
+                <a:latin typeface="游ゴシック"/>
+              </a:rPr>
+              <a:t>  組織全体の数値を大きく左右する。</a:t>
             </a:r>
           </a:p>
           <a:p>
@@ -7942,71 +8485,71 @@
                 </a:solidFill>
                 <a:latin typeface="游ゴシック"/>
               </a:rPr>
-              <a:t>■ 読み取れること</a:t>
-            </a:r>
-          </a:p>
-          <a:p>
-            <a:pPr algn="l">
-              <a:spcAft>
-                <a:spcPts val="300"/>
-              </a:spcAft>
-            </a:pPr>
-            <a:r>
-              <a:rPr sz="1200" b="0">
-                <a:solidFill>
-                  <a:srgbClr val="444444"/>
-                </a:solidFill>
-                <a:latin typeface="游ゴシック"/>
-              </a:rPr>
-              <a:t>  開発は高水準かつ安定。一方、営業は</a:t>
-            </a:r>
-          </a:p>
-          <a:p>
-            <a:pPr algn="l">
-              <a:spcAft>
-                <a:spcPts val="300"/>
-              </a:spcAft>
-            </a:pPr>
-            <a:r>
-              <a:rPr sz="1200" b="0">
-                <a:solidFill>
-                  <a:srgbClr val="444444"/>
-                </a:solidFill>
-                <a:latin typeface="游ゴシック"/>
-              </a:rPr>
-              <a:t>  最高93点のトップがいても最低70点が</a:t>
-            </a:r>
-          </a:p>
-          <a:p>
-            <a:pPr algn="l">
-              <a:spcAft>
-                <a:spcPts val="300"/>
-              </a:spcAft>
-            </a:pPr>
-            <a:r>
-              <a:rPr sz="1200" b="0">
-                <a:solidFill>
-                  <a:srgbClr val="444444"/>
-                </a:solidFill>
-                <a:latin typeface="游ゴシック"/>
-              </a:rPr>
-              <a:t>  引き下げており「2極化」が進んでいる。</a:t>
-            </a:r>
-          </a:p>
-          <a:p>
-            <a:pPr algn="l">
-              <a:spcAft>
-                <a:spcPts val="300"/>
-              </a:spcAft>
-            </a:pPr>
-            <a:r>
-              <a:rPr sz="1200" b="0">
-                <a:solidFill>
-                  <a:srgbClr val="444444"/>
-                </a:solidFill>
-                <a:latin typeface="游ゴシック"/>
-              </a:rPr>
-              <a:t>  人事は差が小さいが水準そのものが低い。</a:t>
+              <a:t>■ マーケティング示唆</a:t>
+            </a:r>
+          </a:p>
+          <a:p>
+            <a:pPr algn="l">
+              <a:spcAft>
+                <a:spcPts val="300"/>
+              </a:spcAft>
+            </a:pPr>
+            <a:r>
+              <a:rPr sz="1200" b="0">
+                <a:solidFill>
+                  <a:srgbClr val="444444"/>
+                </a:solidFill>
+                <a:latin typeface="游ゴシック"/>
+              </a:rPr>
+              <a:t>  人事は参加者数も最少（7名）。</a:t>
+            </a:r>
+          </a:p>
+          <a:p>
+            <a:pPr algn="l">
+              <a:spcAft>
+                <a:spcPts val="300"/>
+              </a:spcAft>
+            </a:pPr>
+            <a:r>
+              <a:rPr sz="1200" b="0">
+                <a:solidFill>
+                  <a:srgbClr val="444444"/>
+                </a:solidFill>
+                <a:latin typeface="游ゴシック"/>
+              </a:rPr>
+              <a:t>  少人数で均質な低スコアという</a:t>
+            </a:r>
+          </a:p>
+          <a:p>
+            <a:pPr algn="l">
+              <a:spcAft>
+                <a:spcPts val="300"/>
+              </a:spcAft>
+            </a:pPr>
+            <a:r>
+              <a:rPr sz="1200" b="0">
+                <a:solidFill>
+                  <a:srgbClr val="444444"/>
+                </a:solidFill>
+                <a:latin typeface="游ゴシック"/>
+              </a:rPr>
+              <a:t>  構造は、集団研修より個別介入が</a:t>
+            </a:r>
+          </a:p>
+          <a:p>
+            <a:pPr algn="l">
+              <a:spcAft>
+                <a:spcPts val="300"/>
+              </a:spcAft>
+            </a:pPr>
+            <a:r>
+              <a:rPr sz="1200" b="0">
+                <a:solidFill>
+                  <a:srgbClr val="444444"/>
+                </a:solidFill>
+                <a:latin typeface="游ゴシック"/>
+              </a:rPr>
+              <a:t>  効果的であることを示唆する。</a:t>
             </a:r>
           </a:p>
         </p:txBody>
@@ -8153,7 +8696,7 @@
                 </a:solidFill>
                 <a:latin typeface="游ゴシック"/>
               </a:rPr>
-              <a:t>課題3｜スコア分布ヒストグラム</a:t>
+              <a:t>課題3｜所属別スコア比較（会社データ）</a:t>
             </a:r>
           </a:p>
         </p:txBody>
@@ -8188,7 +8731,7 @@
                 </a:solidFill>
                 <a:latin typeface="游ゴシック"/>
               </a:rPr>
-              <a:t>所属別色分け＋全体平均線（84.9点）</a:t>
+              <a:t>平均・最高・最低 グループ棒グラフ</a:t>
             </a:r>
           </a:p>
         </p:txBody>
@@ -8238,7 +8781,7 @@
       </p:sp>
       <p:pic>
         <p:nvPicPr>
-          <p:cNvPr id="7" name="Picture 6" descr="graph3_histogram.png"/>
+          <p:cNvPr id="7" name="Picture 6" descr="graph2_bar.png"/>
           <p:cNvPicPr>
             <a:picLocks noChangeAspect="1"/>
           </p:cNvPicPr>
@@ -8376,7 +8919,7 @@
                 </a:solidFill>
                 <a:latin typeface="游ゴシック"/>
               </a:rPr>
-              <a:t>分布形状から読む組織状態</a:t>
+              <a:t>スコア比較の着眼点</a:t>
             </a:r>
           </a:p>
         </p:txBody>
@@ -8415,39 +8958,71 @@
                 </a:solidFill>
                 <a:latin typeface="游ゴシック"/>
               </a:rPr>
-              <a:t>■ 全体平均：84.9点</a:t>
-            </a:r>
-          </a:p>
-          <a:p>
-            <a:pPr algn="l">
-              <a:spcAft>
-                <a:spcPts val="300"/>
-              </a:spcAft>
-            </a:pPr>
-            <a:r>
-              <a:rPr sz="1200" b="0">
-                <a:solidFill>
-                  <a:srgbClr val="444444"/>
-                </a:solidFill>
-                <a:latin typeface="游ゴシック"/>
-              </a:rPr>
-              <a:t>  中央値86点 ＞ 平均84.9点</a:t>
-            </a:r>
-          </a:p>
-          <a:p>
-            <a:pPr algn="l">
-              <a:spcAft>
-                <a:spcPts val="300"/>
-              </a:spcAft>
-            </a:pPr>
-            <a:r>
-              <a:rPr sz="1200" b="0">
-                <a:solidFill>
-                  <a:srgbClr val="444444"/>
-                </a:solidFill>
-                <a:latin typeface="游ゴシック"/>
-              </a:rPr>
-              <a:t>  → 低スコア側に引っ張られる分布</a:t>
+              <a:t>■ 部門別ランキング（平均）</a:t>
+            </a:r>
+          </a:p>
+          <a:p>
+            <a:pPr algn="l">
+              <a:spcAft>
+                <a:spcPts val="300"/>
+              </a:spcAft>
+            </a:pPr>
+            <a:r>
+              <a:rPr sz="1200" b="0">
+                <a:solidFill>
+                  <a:srgbClr val="444444"/>
+                </a:solidFill>
+                <a:latin typeface="游ゴシック"/>
+              </a:rPr>
+              <a:t>  1位 開発   88.9点</a:t>
+            </a:r>
+          </a:p>
+          <a:p>
+            <a:pPr algn="l">
+              <a:spcAft>
+                <a:spcPts val="300"/>
+              </a:spcAft>
+            </a:pPr>
+            <a:r>
+              <a:rPr sz="1200" b="0">
+                <a:solidFill>
+                  <a:srgbClr val="444444"/>
+                </a:solidFill>
+                <a:latin typeface="游ゴシック"/>
+              </a:rPr>
+              <a:t>  2位 管理   87.1点</a:t>
+            </a:r>
+          </a:p>
+          <a:p>
+            <a:pPr algn="l">
+              <a:spcAft>
+                <a:spcPts val="300"/>
+              </a:spcAft>
+            </a:pPr>
+            <a:r>
+              <a:rPr sz="1200" b="0">
+                <a:solidFill>
+                  <a:srgbClr val="444444"/>
+                </a:solidFill>
+                <a:latin typeface="游ゴシック"/>
+              </a:rPr>
+              <a:t>  3位 営業   83.0点</a:t>
+            </a:r>
+          </a:p>
+          <a:p>
+            <a:pPr algn="l">
+              <a:spcAft>
+                <a:spcPts val="300"/>
+              </a:spcAft>
+            </a:pPr>
+            <a:r>
+              <a:rPr sz="1200" b="0">
+                <a:solidFill>
+                  <a:srgbClr val="444444"/>
+                </a:solidFill>
+                <a:latin typeface="游ゴシック"/>
+              </a:rPr>
+              <a:t>  4位 人事   79.3点</a:t>
             </a:r>
           </a:p>
           <a:p>
@@ -8479,39 +9054,55 @@
                 </a:solidFill>
                 <a:latin typeface="游ゴシック"/>
               </a:rPr>
-              <a:t>■ 右寄り（高得点）に集中する部門</a:t>
-            </a:r>
-          </a:p>
-          <a:p>
-            <a:pPr algn="l">
-              <a:spcAft>
-                <a:spcPts val="300"/>
-              </a:spcAft>
-            </a:pPr>
-            <a:r>
-              <a:rPr sz="1200" b="0">
-                <a:solidFill>
-                  <a:srgbClr val="444444"/>
-                </a:solidFill>
-                <a:latin typeface="游ゴシック"/>
-              </a:rPr>
-              <a:t>  開発・管理は90点台に多くの人材</a:t>
-            </a:r>
-          </a:p>
-          <a:p>
-            <a:pPr algn="l">
-              <a:spcAft>
-                <a:spcPts val="300"/>
-              </a:spcAft>
-            </a:pPr>
-            <a:r>
-              <a:rPr sz="1200" b="0">
-                <a:solidFill>
-                  <a:srgbClr val="444444"/>
-                </a:solidFill>
-                <a:latin typeface="游ゴシック"/>
-              </a:rPr>
-              <a:t>  → 高水準で安定したパフォーマンス</a:t>
+              <a:t>■ 安定性（最高〜最低の差）</a:t>
+            </a:r>
+          </a:p>
+          <a:p>
+            <a:pPr algn="l">
+              <a:spcAft>
+                <a:spcPts val="300"/>
+              </a:spcAft>
+            </a:pPr>
+            <a:r>
+              <a:rPr sz="1200" b="0">
+                <a:solidFill>
+                  <a:srgbClr val="444444"/>
+                </a:solidFill>
+                <a:latin typeface="游ゴシック"/>
+              </a:rPr>
+              <a:t>  開発：94-82 ＝ 12点差（安定）</a:t>
+            </a:r>
+          </a:p>
+          <a:p>
+            <a:pPr algn="l">
+              <a:spcAft>
+                <a:spcPts val="300"/>
+              </a:spcAft>
+            </a:pPr>
+            <a:r>
+              <a:rPr sz="1200" b="0">
+                <a:solidFill>
+                  <a:srgbClr val="444444"/>
+                </a:solidFill>
+                <a:latin typeface="游ゴシック"/>
+              </a:rPr>
+              <a:t>  営業：93-70 ＝ 23点差（不安定）</a:t>
+            </a:r>
+          </a:p>
+          <a:p>
+            <a:pPr algn="l">
+              <a:spcAft>
+                <a:spcPts val="300"/>
+              </a:spcAft>
+            </a:pPr>
+            <a:r>
+              <a:rPr sz="1200" b="0">
+                <a:solidFill>
+                  <a:srgbClr val="444444"/>
+                </a:solidFill>
+                <a:latin typeface="游ゴシック"/>
+              </a:rPr>
+              <a:t>  人事：82-75 ＝  7点差（均質低）</a:t>
             </a:r>
           </a:p>
           <a:p>
@@ -8543,135 +9134,71 @@
                 </a:solidFill>
                 <a:latin typeface="游ゴシック"/>
               </a:rPr>
-              <a:t>■ 左寄り（低得点）が目立つ部門</a:t>
-            </a:r>
-          </a:p>
-          <a:p>
-            <a:pPr algn="l">
-              <a:spcAft>
-                <a:spcPts val="300"/>
-              </a:spcAft>
-            </a:pPr>
-            <a:r>
-              <a:rPr sz="1200" b="0">
-                <a:solidFill>
-                  <a:srgbClr val="444444"/>
-                </a:solidFill>
-                <a:latin typeface="游ゴシック"/>
-              </a:rPr>
-              <a:t>  人事は75〜82点帯に全員が集中</a:t>
-            </a:r>
-          </a:p>
-          <a:p>
-            <a:pPr algn="l">
-              <a:spcAft>
-                <a:spcPts val="300"/>
-              </a:spcAft>
-            </a:pPr>
-            <a:r>
-              <a:rPr sz="1200" b="0">
-                <a:solidFill>
-                  <a:srgbClr val="444444"/>
-                </a:solidFill>
-                <a:latin typeface="游ゴシック"/>
-              </a:rPr>
-              <a:t>  営業は70〜80点帯にも複数名</a:t>
-            </a:r>
-          </a:p>
-          <a:p>
-            <a:pPr algn="l">
-              <a:spcAft>
-                <a:spcPts val="300"/>
-              </a:spcAft>
-            </a:pPr>
-            <a:r>
-              <a:rPr sz="1200" b="0">
-                <a:solidFill>
-                  <a:srgbClr val="444444"/>
-                </a:solidFill>
-                <a:latin typeface="游ゴシック"/>
-              </a:rPr>
-              <a:t/>
-            </a:r>
-          </a:p>
-          <a:p>
-            <a:pPr algn="l">
-              <a:spcAft>
-                <a:spcPts val="300"/>
-              </a:spcAft>
-            </a:pPr>
-            <a:r>
-              <a:rPr sz="1200" b="0">
-                <a:solidFill>
-                  <a:srgbClr val="444444"/>
-                </a:solidFill>
-                <a:latin typeface="游ゴシック"/>
-              </a:rPr>
-              <a:t>■ マーケティング的解釈</a:t>
-            </a:r>
-          </a:p>
-          <a:p>
-            <a:pPr algn="l">
-              <a:spcAft>
-                <a:spcPts val="300"/>
-              </a:spcAft>
-            </a:pPr>
-            <a:r>
-              <a:rPr sz="1200" b="0">
-                <a:solidFill>
-                  <a:srgbClr val="444444"/>
-                </a:solidFill>
-                <a:latin typeface="游ゴシック"/>
-              </a:rPr>
-              <a:t>  人事の分布は「正規分布」ではなく</a:t>
-            </a:r>
-          </a:p>
-          <a:p>
-            <a:pPr algn="l">
-              <a:spcAft>
-                <a:spcPts val="300"/>
-              </a:spcAft>
-            </a:pPr>
-            <a:r>
-              <a:rPr sz="1200" b="0">
-                <a:solidFill>
-                  <a:srgbClr val="444444"/>
-                </a:solidFill>
-                <a:latin typeface="游ゴシック"/>
-              </a:rPr>
-              <a:t>  「圧縮された低水準の山」。</a:t>
-            </a:r>
-          </a:p>
-          <a:p>
-            <a:pPr algn="l">
-              <a:spcAft>
-                <a:spcPts val="300"/>
-              </a:spcAft>
-            </a:pPr>
-            <a:r>
-              <a:rPr sz="1200" b="0">
-                <a:solidFill>
-                  <a:srgbClr val="444444"/>
-                </a:solidFill>
-                <a:latin typeface="游ゴシック"/>
-              </a:rPr>
-              <a:t>  外部刺激（研修・人材交流）なしに</a:t>
-            </a:r>
-          </a:p>
-          <a:p>
-            <a:pPr algn="l">
-              <a:spcAft>
-                <a:spcPts val="300"/>
-              </a:spcAft>
-            </a:pPr>
-            <a:r>
-              <a:rPr sz="1200" b="0">
-                <a:solidFill>
-                  <a:srgbClr val="444444"/>
-                </a:solidFill>
-                <a:latin typeface="游ゴシック"/>
-              </a:rPr>
-              <a:t>  自然改善は期待しにくい状態。</a:t>
+              <a:t>■ 読み取れること</a:t>
+            </a:r>
+          </a:p>
+          <a:p>
+            <a:pPr algn="l">
+              <a:spcAft>
+                <a:spcPts val="300"/>
+              </a:spcAft>
+            </a:pPr>
+            <a:r>
+              <a:rPr sz="1200" b="0">
+                <a:solidFill>
+                  <a:srgbClr val="444444"/>
+                </a:solidFill>
+                <a:latin typeface="游ゴシック"/>
+              </a:rPr>
+              <a:t>  開発は高水準かつ安定。一方、営業は</a:t>
+            </a:r>
+          </a:p>
+          <a:p>
+            <a:pPr algn="l">
+              <a:spcAft>
+                <a:spcPts val="300"/>
+              </a:spcAft>
+            </a:pPr>
+            <a:r>
+              <a:rPr sz="1200" b="0">
+                <a:solidFill>
+                  <a:srgbClr val="444444"/>
+                </a:solidFill>
+                <a:latin typeface="游ゴシック"/>
+              </a:rPr>
+              <a:t>  最高93点のトップがいても最低70点が</a:t>
+            </a:r>
+          </a:p>
+          <a:p>
+            <a:pPr algn="l">
+              <a:spcAft>
+                <a:spcPts val="300"/>
+              </a:spcAft>
+            </a:pPr>
+            <a:r>
+              <a:rPr sz="1200" b="0">
+                <a:solidFill>
+                  <a:srgbClr val="444444"/>
+                </a:solidFill>
+                <a:latin typeface="游ゴシック"/>
+              </a:rPr>
+              <a:t>  引き下げており「2極化」が進んでいる。</a:t>
+            </a:r>
+          </a:p>
+          <a:p>
+            <a:pPr algn="l">
+              <a:spcAft>
+                <a:spcPts val="300"/>
+              </a:spcAft>
+            </a:pPr>
+            <a:r>
+              <a:rPr sz="1200" b="0">
+                <a:solidFill>
+                  <a:srgbClr val="444444"/>
+                </a:solidFill>
+                <a:latin typeface="游ゴシック"/>
+              </a:rPr>
+              <a:t>  人事は差が小さいが水準そのものが低い。</a:t>
             </a:r>
           </a:p>
         </p:txBody>
@@ -8818,7 +9345,7 @@
                 </a:solidFill>
                 <a:latin typeface="游ゴシック"/>
               </a:rPr>
-              <a:t>課題3｜マーケティング分析サマリー</a:t>
+              <a:t>課題3｜スコア分布ヒストグラム（会社データ）</a:t>
             </a:r>
           </a:p>
         </p:txBody>
@@ -8853,7 +9380,7 @@
                 </a:solidFill>
                 <a:latin typeface="游ゴシック"/>
               </a:rPr>
-              <a:t>強み・課題・リスクの三層構造</a:t>
+              <a:t>所属別色分け＋全体平均線（84.9点）</a:t>
             </a:r>
           </a:p>
         </p:txBody>
@@ -8901,22 +9428,46 @@
           </a:p>
         </p:txBody>
       </p:sp>
-      <p:sp>
-        <p:nvSpPr>
-          <p:cNvPr id="7" name="Rectangle 6"/>
+      <p:pic>
+        <p:nvPicPr>
+          <p:cNvPr id="7" name="Picture 6" descr="graph3_histogram.png"/>
+          <p:cNvPicPr>
+            <a:picLocks noChangeAspect="1"/>
+          </p:cNvPicPr>
+          <p:nvPr/>
+        </p:nvPicPr>
+        <p:blipFill>
+          <a:blip r:embed="rId2"/>
+          <a:stretch>
+            <a:fillRect/>
+          </a:stretch>
+        </p:blipFill>
+        <p:spPr>
+          <a:xfrm>
+            <a:off x="274320" y="1051560"/>
+            <a:ext cx="7315200" cy="5349240"/>
+          </a:xfrm>
+          <a:prstGeom prst="rect">
+            <a:avLst/>
+          </a:prstGeom>
+        </p:spPr>
+      </p:pic>
+      <p:sp>
+        <p:nvSpPr>
+          <p:cNvPr id="8" name="Rectangle 7"/>
           <p:cNvSpPr/>
           <p:nvPr/>
         </p:nvSpPr>
         <p:spPr>
           <a:xfrm>
-            <a:off x="274320" y="1051560"/>
-            <a:ext cx="3520440" cy="5486400"/>
+            <a:off x="7772400" y="1051560"/>
+            <a:ext cx="4160520" cy="5349240"/>
           </a:xfrm>
           <a:prstGeom prst="rect">
             <a:avLst/>
           </a:prstGeom>
           <a:solidFill>
-            <a:srgbClr val="E2F4E8"/>
+            <a:srgbClr val="F5F5F5"/>
           </a:solidFill>
           <a:ln>
             <a:noFill/>
@@ -8946,20 +9497,20 @@
       </p:sp>
       <p:sp>
         <p:nvSpPr>
-          <p:cNvPr id="8" name="Rectangle 7"/>
+          <p:cNvPr id="9" name="Rectangle 8"/>
           <p:cNvSpPr/>
           <p:nvPr/>
         </p:nvSpPr>
         <p:spPr>
           <a:xfrm>
-            <a:off x="274320" y="1051560"/>
-            <a:ext cx="3520440" cy="457200"/>
+            <a:off x="7772400" y="1051560"/>
+            <a:ext cx="64008" cy="5349240"/>
           </a:xfrm>
           <a:prstGeom prst="rect">
             <a:avLst/>
           </a:prstGeom>
           <a:solidFill>
-            <a:srgbClr val="1E7A45"/>
+            <a:srgbClr val="2E75B6"/>
           </a:solidFill>
           <a:ln>
             <a:noFill/>
@@ -8989,14 +9540,14 @@
       </p:sp>
       <p:sp>
         <p:nvSpPr>
-          <p:cNvPr id="9" name="TextBox 8"/>
+          <p:cNvPr id="10" name="TextBox 9"/>
           <p:cNvSpPr txBox="1"/>
           <p:nvPr/>
         </p:nvSpPr>
         <p:spPr>
           <a:xfrm>
-            <a:off x="384048" y="1097280"/>
-            <a:ext cx="3291840" cy="384048"/>
+            <a:off x="7936992" y="1143000"/>
+            <a:ext cx="3931920" cy="365760"/>
           </a:xfrm>
           <a:prstGeom prst="rect">
             <a:avLst/>
@@ -9011,27 +9562,27 @@
           <a:p>
             <a:pPr algn="l"/>
             <a:r>
-              <a:rPr sz="1400" b="1" i="0">
-                <a:solidFill>
-                  <a:srgbClr val="FFFFFF"/>
-                </a:solidFill>
-                <a:latin typeface="游ゴシック"/>
-              </a:rPr>
-              <a:t>強み（開発・管理）</a:t>
-            </a:r>
-          </a:p>
-        </p:txBody>
-      </p:sp>
-      <p:sp>
-        <p:nvSpPr>
-          <p:cNvPr id="10" name="TextBox 9"/>
+              <a:rPr sz="1300" b="1" i="0">
+                <a:solidFill>
+                  <a:srgbClr val="2E75B6"/>
+                </a:solidFill>
+                <a:latin typeface="游ゴシック"/>
+              </a:rPr>
+              <a:t>分布形状から読む組織状態</a:t>
+            </a:r>
+          </a:p>
+        </p:txBody>
+      </p:sp>
+      <p:sp>
+        <p:nvSpPr>
+          <p:cNvPr id="11" name="TextBox 10"/>
           <p:cNvSpPr txBox="1"/>
           <p:nvPr/>
         </p:nvSpPr>
         <p:spPr>
           <a:xfrm>
-            <a:off x="411479" y="1572768"/>
-            <a:ext cx="3291840" cy="4892040"/>
+            <a:off x="7936992" y="1554480"/>
+            <a:ext cx="3886200" cy="4754879"/>
           </a:xfrm>
           <a:prstGeom prst="rect">
             <a:avLst/>
@@ -9056,87 +9607,39 @@
                 </a:solidFill>
                 <a:latin typeface="游ゴシック"/>
               </a:rPr>
-              <a:t>開発：平均88.9点・標準偏差3.57</a:t>
-            </a:r>
-          </a:p>
-          <a:p>
-            <a:pPr algn="l">
-              <a:spcAft>
-                <a:spcPts val="300"/>
-              </a:spcAft>
-            </a:pPr>
-            <a:r>
-              <a:rPr sz="1200" b="0">
-                <a:solidFill>
-                  <a:srgbClr val="444444"/>
-                </a:solidFill>
-                <a:latin typeface="游ゴシック"/>
-              </a:rPr>
-              <a:t>　→ 高品質かつ安定したアウトプット</a:t>
-            </a:r>
-          </a:p>
-          <a:p>
-            <a:pPr algn="l">
-              <a:spcAft>
-                <a:spcPts val="300"/>
-              </a:spcAft>
-            </a:pPr>
-            <a:r>
-              <a:rPr sz="1200" b="0">
-                <a:solidFill>
-                  <a:srgbClr val="444444"/>
-                </a:solidFill>
-                <a:latin typeface="游ゴシック"/>
-              </a:rPr>
-              <a:t>管理：平均87.1点・標準偏差5.62</a:t>
-            </a:r>
-          </a:p>
-          <a:p>
-            <a:pPr algn="l">
-              <a:spcAft>
-                <a:spcPts val="300"/>
-              </a:spcAft>
-            </a:pPr>
-            <a:r>
-              <a:rPr sz="1200" b="0">
-                <a:solidFill>
-                  <a:srgbClr val="444444"/>
-                </a:solidFill>
-                <a:latin typeface="游ゴシック"/>
-              </a:rPr>
-              <a:t>　→ 均整のとれた高水準チーム</a:t>
-            </a:r>
-          </a:p>
-          <a:p>
-            <a:pPr algn="l">
-              <a:spcAft>
-                <a:spcPts val="300"/>
-              </a:spcAft>
-            </a:pPr>
-            <a:r>
-              <a:rPr sz="1200" b="0">
-                <a:solidFill>
-                  <a:srgbClr val="444444"/>
-                </a:solidFill>
-                <a:latin typeface="游ゴシック"/>
-              </a:rPr>
-              <a:t>ハイパフォーマー率（90点以上）</a:t>
-            </a:r>
-          </a:p>
-          <a:p>
-            <a:pPr algn="l">
-              <a:spcAft>
-                <a:spcPts val="300"/>
-              </a:spcAft>
-            </a:pPr>
-            <a:r>
-              <a:rPr sz="1200" b="0">
-                <a:solidFill>
-                  <a:srgbClr val="444444"/>
-                </a:solidFill>
-                <a:latin typeface="游ゴシック"/>
-              </a:rPr>
-              <a:t>　開発40% / 管理37.5%</a:t>
+              <a:t>■ 全体平均：84.9点</a:t>
+            </a:r>
+          </a:p>
+          <a:p>
+            <a:pPr algn="l">
+              <a:spcAft>
+                <a:spcPts val="300"/>
+              </a:spcAft>
+            </a:pPr>
+            <a:r>
+              <a:rPr sz="1200" b="0">
+                <a:solidFill>
+                  <a:srgbClr val="444444"/>
+                </a:solidFill>
+                <a:latin typeface="游ゴシック"/>
+              </a:rPr>
+              <a:t>  中央値86点 ＞ 平均84.9点</a:t>
+            </a:r>
+          </a:p>
+          <a:p>
+            <a:pPr algn="l">
+              <a:spcAft>
+                <a:spcPts val="300"/>
+              </a:spcAft>
+            </a:pPr>
+            <a:r>
+              <a:rPr sz="1200" b="0">
+                <a:solidFill>
+                  <a:srgbClr val="444444"/>
+                </a:solidFill>
+                <a:latin typeface="游ゴシック"/>
+              </a:rPr>
+              <a:t>  → 低スコア側に引っ張られる分布</a:t>
             </a:r>
           </a:p>
           <a:p>
@@ -9162,285 +9665,45 @@
               </a:spcAft>
             </a:pPr>
             <a:r>
-              <a:rPr sz="1200" b="1">
-                <a:solidFill>
-                  <a:srgbClr val="1E7A45"/>
-                </a:solidFill>
-                <a:latin typeface="游ゴシック"/>
-              </a:rPr>
-              <a:t>【施策】</a:t>
-            </a:r>
-          </a:p>
-          <a:p>
-            <a:pPr algn="l">
-              <a:spcAft>
-                <a:spcPts val="300"/>
-              </a:spcAft>
-            </a:pPr>
-            <a:r>
-              <a:rPr sz="1200" b="0">
-                <a:solidFill>
-                  <a:srgbClr val="444444"/>
-                </a:solidFill>
-                <a:latin typeface="游ゴシック"/>
-              </a:rPr>
-              <a:t>成功パターンをマニュアル化し</a:t>
-            </a:r>
-          </a:p>
-          <a:p>
-            <a:pPr algn="l">
-              <a:spcAft>
-                <a:spcPts val="300"/>
-              </a:spcAft>
-            </a:pPr>
-            <a:r>
-              <a:rPr sz="1200" b="0">
-                <a:solidFill>
-                  <a:srgbClr val="444444"/>
-                </a:solidFill>
-                <a:latin typeface="游ゴシック"/>
-              </a:rPr>
-              <a:t>営業・人事へ横展開する。</a:t>
-            </a:r>
-          </a:p>
-          <a:p>
-            <a:pPr algn="l">
-              <a:spcAft>
-                <a:spcPts val="300"/>
-              </a:spcAft>
-            </a:pPr>
-            <a:r>
-              <a:rPr sz="1200" b="0">
-                <a:solidFill>
-                  <a:srgbClr val="444444"/>
-                </a:solidFill>
-                <a:latin typeface="游ゴシック"/>
-              </a:rPr>
-              <a:t>高スコア者をメンターに任命。</a:t>
-            </a:r>
-          </a:p>
-        </p:txBody>
-      </p:sp>
-      <p:sp>
-        <p:nvSpPr>
-          <p:cNvPr id="11" name="Rectangle 10"/>
-          <p:cNvSpPr/>
-          <p:nvPr/>
-        </p:nvSpPr>
-        <p:spPr>
-          <a:xfrm>
-            <a:off x="4297680" y="1051560"/>
-            <a:ext cx="3520440" cy="5486400"/>
-          </a:xfrm>
-          <a:prstGeom prst="rect">
-            <a:avLst/>
-          </a:prstGeom>
-          <a:solidFill>
-            <a:srgbClr val="FDF2DC"/>
-          </a:solidFill>
-          <a:ln>
-            <a:noFill/>
-          </a:ln>
-        </p:spPr>
-        <p:style>
-          <a:lnRef idx="1">
-            <a:schemeClr val="accent1"/>
-          </a:lnRef>
-          <a:fillRef idx="3">
-            <a:schemeClr val="accent1"/>
-          </a:fillRef>
-          <a:effectRef idx="2">
-            <a:schemeClr val="accent1"/>
-          </a:effectRef>
-          <a:fontRef idx="minor">
-            <a:schemeClr val="lt1"/>
-          </a:fontRef>
-        </p:style>
-        <p:txBody>
-          <a:bodyPr rtlCol="0" anchor="ctr"/>
-          <a:lstStyle/>
-          <a:p>
-            <a:pPr algn="ctr"/>
-          </a:p>
-        </p:txBody>
-      </p:sp>
-      <p:sp>
-        <p:nvSpPr>
-          <p:cNvPr id="12" name="Rectangle 11"/>
-          <p:cNvSpPr/>
-          <p:nvPr/>
-        </p:nvSpPr>
-        <p:spPr>
-          <a:xfrm>
-            <a:off x="4297680" y="1051560"/>
-            <a:ext cx="3520440" cy="457200"/>
-          </a:xfrm>
-          <a:prstGeom prst="rect">
-            <a:avLst/>
-          </a:prstGeom>
-          <a:solidFill>
-            <a:srgbClr val="BF6C00"/>
-          </a:solidFill>
-          <a:ln>
-            <a:noFill/>
-          </a:ln>
-        </p:spPr>
-        <p:style>
-          <a:lnRef idx="1">
-            <a:schemeClr val="accent1"/>
-          </a:lnRef>
-          <a:fillRef idx="3">
-            <a:schemeClr val="accent1"/>
-          </a:fillRef>
-          <a:effectRef idx="2">
-            <a:schemeClr val="accent1"/>
-          </a:effectRef>
-          <a:fontRef idx="minor">
-            <a:schemeClr val="lt1"/>
-          </a:fontRef>
-        </p:style>
-        <p:txBody>
-          <a:bodyPr rtlCol="0" anchor="ctr"/>
-          <a:lstStyle/>
-          <a:p>
-            <a:pPr algn="ctr"/>
-          </a:p>
-        </p:txBody>
-      </p:sp>
-      <p:sp>
-        <p:nvSpPr>
-          <p:cNvPr id="13" name="TextBox 12"/>
-          <p:cNvSpPr txBox="1"/>
-          <p:nvPr/>
-        </p:nvSpPr>
-        <p:spPr>
-          <a:xfrm>
-            <a:off x="4407408" y="1097280"/>
-            <a:ext cx="3291840" cy="384048"/>
-          </a:xfrm>
-          <a:prstGeom prst="rect">
-            <a:avLst/>
-          </a:prstGeom>
-          <a:noFill/>
-        </p:spPr>
-        <p:txBody>
-          <a:bodyPr wrap="square">
-            <a:spAutoFit/>
-          </a:bodyPr>
-          <a:lstStyle/>
-          <a:p>
-            <a:pPr algn="l"/>
-            <a:r>
-              <a:rPr sz="1400" b="1" i="0">
-                <a:solidFill>
-                  <a:srgbClr val="FFFFFF"/>
-                </a:solidFill>
-                <a:latin typeface="游ゴシック"/>
-              </a:rPr>
-              <a:t>課題（人事）</a:t>
-            </a:r>
-          </a:p>
-        </p:txBody>
-      </p:sp>
-      <p:sp>
-        <p:nvSpPr>
-          <p:cNvPr id="14" name="TextBox 13"/>
-          <p:cNvSpPr txBox="1"/>
-          <p:nvPr/>
-        </p:nvSpPr>
-        <p:spPr>
-          <a:xfrm>
-            <a:off x="4434840" y="1572768"/>
-            <a:ext cx="3291840" cy="4892040"/>
-          </a:xfrm>
-          <a:prstGeom prst="rect">
-            <a:avLst/>
-          </a:prstGeom>
-          <a:noFill/>
-        </p:spPr>
-        <p:txBody>
-          <a:bodyPr wrap="square">
-            <a:spAutoFit/>
-          </a:bodyPr>
-          <a:lstStyle/>
-          <a:p>
-            <a:pPr algn="l">
-              <a:spcAft>
-                <a:spcPts val="300"/>
-              </a:spcAft>
-            </a:pPr>
-            <a:r>
-              <a:rPr sz="1200" b="0">
-                <a:solidFill>
-                  <a:srgbClr val="444444"/>
-                </a:solidFill>
-                <a:latin typeface="游ゴシック"/>
-              </a:rPr>
-              <a:t>平均79.3点（全体比 −5.6点）</a:t>
-            </a:r>
-          </a:p>
-          <a:p>
-            <a:pPr algn="l">
-              <a:spcAft>
-                <a:spcPts val="300"/>
-              </a:spcAft>
-            </a:pPr>
-            <a:r>
-              <a:rPr sz="1200" b="0">
-                <a:solidFill>
-                  <a:srgbClr val="444444"/>
-                </a:solidFill>
-                <a:latin typeface="游ゴシック"/>
-              </a:rPr>
-              <a:t>　→ 全部門で唯一80点未満</a:t>
-            </a:r>
-          </a:p>
-          <a:p>
-            <a:pPr algn="l">
-              <a:spcAft>
-                <a:spcPts val="300"/>
-              </a:spcAft>
-            </a:pPr>
-            <a:r>
-              <a:rPr sz="1200" b="0">
-                <a:solidFill>
-                  <a:srgbClr val="444444"/>
-                </a:solidFill>
-                <a:latin typeface="游ゴシック"/>
-              </a:rPr>
-              <a:t>ハイパフォーマー：0名</a:t>
-            </a:r>
-          </a:p>
-          <a:p>
-            <a:pPr algn="l">
-              <a:spcAft>
-                <a:spcPts val="300"/>
-              </a:spcAft>
-            </a:pPr>
-            <a:r>
-              <a:rPr sz="1200" b="0">
-                <a:solidFill>
-                  <a:srgbClr val="444444"/>
-                </a:solidFill>
-                <a:latin typeface="游ゴシック"/>
-              </a:rPr>
-              <a:t>標準偏差2.29（最小）</a:t>
-            </a:r>
-          </a:p>
-          <a:p>
-            <a:pPr algn="l">
-              <a:spcAft>
-                <a:spcPts val="300"/>
-              </a:spcAft>
-            </a:pPr>
-            <a:r>
-              <a:rPr sz="1200" b="0">
-                <a:solidFill>
-                  <a:srgbClr val="444444"/>
-                </a:solidFill>
-                <a:latin typeface="游ゴシック"/>
-              </a:rPr>
-              <a:t>　→ 全員が同じ低水準に均質化</a:t>
+              <a:rPr sz="1200" b="0">
+                <a:solidFill>
+                  <a:srgbClr val="444444"/>
+                </a:solidFill>
+                <a:latin typeface="游ゴシック"/>
+              </a:rPr>
+              <a:t>■ 右寄り（高得点）に集中する部門</a:t>
+            </a:r>
+          </a:p>
+          <a:p>
+            <a:pPr algn="l">
+              <a:spcAft>
+                <a:spcPts val="300"/>
+              </a:spcAft>
+            </a:pPr>
+            <a:r>
+              <a:rPr sz="1200" b="0">
+                <a:solidFill>
+                  <a:srgbClr val="444444"/>
+                </a:solidFill>
+                <a:latin typeface="游ゴシック"/>
+              </a:rPr>
+              <a:t>  開発・管理は90点台に多くの人材</a:t>
+            </a:r>
+          </a:p>
+          <a:p>
+            <a:pPr algn="l">
+              <a:spcAft>
+                <a:spcPts val="300"/>
+              </a:spcAft>
+            </a:pPr>
+            <a:r>
+              <a:rPr sz="1200" b="0">
+                <a:solidFill>
+                  <a:srgbClr val="444444"/>
+                </a:solidFill>
+                <a:latin typeface="游ゴシック"/>
+              </a:rPr>
+              <a:t>  → 高水準で安定したパフォーマンス</a:t>
             </a:r>
           </a:p>
           <a:p>
@@ -9466,61 +9729,45 @@
               </a:spcAft>
             </a:pPr>
             <a:r>
-              <a:rPr sz="1200" b="1">
-                <a:solidFill>
-                  <a:srgbClr val="BF6C00"/>
-                </a:solidFill>
-                <a:latin typeface="游ゴシック"/>
-              </a:rPr>
-              <a:t>【なぜ問題か】</a:t>
-            </a:r>
-          </a:p>
-          <a:p>
-            <a:pPr algn="l">
-              <a:spcAft>
-                <a:spcPts val="300"/>
-              </a:spcAft>
-            </a:pPr>
-            <a:r>
-              <a:rPr sz="1200" b="0">
-                <a:solidFill>
-                  <a:srgbClr val="444444"/>
-                </a:solidFill>
-                <a:latin typeface="游ゴシック"/>
-              </a:rPr>
-              <a:t>人事が弱いと採用品質・</a:t>
-            </a:r>
-          </a:p>
-          <a:p>
-            <a:pPr algn="l">
-              <a:spcAft>
-                <a:spcPts val="300"/>
-              </a:spcAft>
-            </a:pPr>
-            <a:r>
-              <a:rPr sz="1200" b="0">
-                <a:solidFill>
-                  <a:srgbClr val="444444"/>
-                </a:solidFill>
-                <a:latin typeface="游ゴシック"/>
-              </a:rPr>
-              <a:t>組織施策・人材育成に連鎖影響。</a:t>
-            </a:r>
-          </a:p>
-          <a:p>
-            <a:pPr algn="l">
-              <a:spcAft>
-                <a:spcPts val="300"/>
-              </a:spcAft>
-            </a:pPr>
-            <a:r>
-              <a:rPr sz="1200" b="0">
-                <a:solidFill>
-                  <a:srgbClr val="444444"/>
-                </a:solidFill>
-                <a:latin typeface="游ゴシック"/>
-              </a:rPr>
-              <a:t>組織全体の底を規定する部門。</a:t>
+              <a:rPr sz="1200" b="0">
+                <a:solidFill>
+                  <a:srgbClr val="444444"/>
+                </a:solidFill>
+                <a:latin typeface="游ゴシック"/>
+              </a:rPr>
+              <a:t>■ 左寄り（低得点）が目立つ部門</a:t>
+            </a:r>
+          </a:p>
+          <a:p>
+            <a:pPr algn="l">
+              <a:spcAft>
+                <a:spcPts val="300"/>
+              </a:spcAft>
+            </a:pPr>
+            <a:r>
+              <a:rPr sz="1200" b="0">
+                <a:solidFill>
+                  <a:srgbClr val="444444"/>
+                </a:solidFill>
+                <a:latin typeface="游ゴシック"/>
+              </a:rPr>
+              <a:t>  人事は75〜82点帯に全員が集中</a:t>
+            </a:r>
+          </a:p>
+          <a:p>
+            <a:pPr algn="l">
+              <a:spcAft>
+                <a:spcPts val="300"/>
+              </a:spcAft>
+            </a:pPr>
+            <a:r>
+              <a:rPr sz="1200" b="0">
+                <a:solidFill>
+                  <a:srgbClr val="444444"/>
+                </a:solidFill>
+                <a:latin typeface="游ゴシック"/>
+              </a:rPr>
+              <a:t>  営業は70〜80点帯にも複数名</a:t>
             </a:r>
           </a:p>
           <a:p>
@@ -9546,349 +9793,77 @@
               </a:spcAft>
             </a:pPr>
             <a:r>
-              <a:rPr sz="1200" b="1">
-                <a:solidFill>
-                  <a:srgbClr val="BF6C00"/>
-                </a:solidFill>
-                <a:latin typeface="游ゴシック"/>
-              </a:rPr>
-              <a:t>【施策】外部研修・個別コーチング優先</a:t>
-            </a:r>
-          </a:p>
-        </p:txBody>
-      </p:sp>
-      <p:sp>
-        <p:nvSpPr>
-          <p:cNvPr id="15" name="Rectangle 14"/>
-          <p:cNvSpPr/>
-          <p:nvPr/>
-        </p:nvSpPr>
-        <p:spPr>
-          <a:xfrm>
-            <a:off x="8321040" y="1051560"/>
-            <a:ext cx="3520440" cy="5486400"/>
-          </a:xfrm>
-          <a:prstGeom prst="rect">
-            <a:avLst/>
-          </a:prstGeom>
-          <a:solidFill>
-            <a:srgbClr val="FCE8E8"/>
-          </a:solidFill>
-          <a:ln>
-            <a:noFill/>
-          </a:ln>
-        </p:spPr>
-        <p:style>
-          <a:lnRef idx="1">
-            <a:schemeClr val="accent1"/>
-          </a:lnRef>
-          <a:fillRef idx="3">
-            <a:schemeClr val="accent1"/>
-          </a:fillRef>
-          <a:effectRef idx="2">
-            <a:schemeClr val="accent1"/>
-          </a:effectRef>
-          <a:fontRef idx="minor">
-            <a:schemeClr val="lt1"/>
-          </a:fontRef>
-        </p:style>
-        <p:txBody>
-          <a:bodyPr rtlCol="0" anchor="ctr"/>
-          <a:lstStyle/>
-          <a:p>
-            <a:pPr algn="ctr"/>
-          </a:p>
-        </p:txBody>
-      </p:sp>
-      <p:sp>
-        <p:nvSpPr>
-          <p:cNvPr id="16" name="Rectangle 15"/>
-          <p:cNvSpPr/>
-          <p:nvPr/>
-        </p:nvSpPr>
-        <p:spPr>
-          <a:xfrm>
-            <a:off x="8321040" y="1051560"/>
-            <a:ext cx="3520440" cy="457200"/>
-          </a:xfrm>
-          <a:prstGeom prst="rect">
-            <a:avLst/>
-          </a:prstGeom>
-          <a:solidFill>
-            <a:srgbClr val="C00000"/>
-          </a:solidFill>
-          <a:ln>
-            <a:noFill/>
-          </a:ln>
-        </p:spPr>
-        <p:style>
-          <a:lnRef idx="1">
-            <a:schemeClr val="accent1"/>
-          </a:lnRef>
-          <a:fillRef idx="3">
-            <a:schemeClr val="accent1"/>
-          </a:fillRef>
-          <a:effectRef idx="2">
-            <a:schemeClr val="accent1"/>
-          </a:effectRef>
-          <a:fontRef idx="minor">
-            <a:schemeClr val="lt1"/>
-          </a:fontRef>
-        </p:style>
-        <p:txBody>
-          <a:bodyPr rtlCol="0" anchor="ctr"/>
-          <a:lstStyle/>
-          <a:p>
-            <a:pPr algn="ctr"/>
-          </a:p>
-        </p:txBody>
-      </p:sp>
-      <p:sp>
-        <p:nvSpPr>
-          <p:cNvPr id="17" name="TextBox 16"/>
-          <p:cNvSpPr txBox="1"/>
-          <p:nvPr/>
-        </p:nvSpPr>
-        <p:spPr>
-          <a:xfrm>
-            <a:off x="8430767" y="1097280"/>
-            <a:ext cx="3291840" cy="384048"/>
-          </a:xfrm>
-          <a:prstGeom prst="rect">
-            <a:avLst/>
-          </a:prstGeom>
-          <a:noFill/>
-        </p:spPr>
-        <p:txBody>
-          <a:bodyPr wrap="square">
-            <a:spAutoFit/>
-          </a:bodyPr>
-          <a:lstStyle/>
-          <a:p>
-            <a:pPr algn="l"/>
-            <a:r>
-              <a:rPr sz="1400" b="1" i="0">
-                <a:solidFill>
-                  <a:srgbClr val="FFFFFF"/>
-                </a:solidFill>
-                <a:latin typeface="游ゴシック"/>
-              </a:rPr>
-              <a:t>リスク（営業）</a:t>
-            </a:r>
-          </a:p>
-        </p:txBody>
-      </p:sp>
-      <p:sp>
-        <p:nvSpPr>
-          <p:cNvPr id="18" name="TextBox 17"/>
-          <p:cNvSpPr txBox="1"/>
-          <p:nvPr/>
-        </p:nvSpPr>
-        <p:spPr>
-          <a:xfrm>
-            <a:off x="8458200" y="1572768"/>
-            <a:ext cx="3291840" cy="4892040"/>
-          </a:xfrm>
-          <a:prstGeom prst="rect">
-            <a:avLst/>
-          </a:prstGeom>
-          <a:noFill/>
-        </p:spPr>
-        <p:txBody>
-          <a:bodyPr wrap="square">
-            <a:spAutoFit/>
-          </a:bodyPr>
-          <a:lstStyle/>
-          <a:p>
-            <a:pPr algn="l">
-              <a:spcAft>
-                <a:spcPts val="300"/>
-              </a:spcAft>
-            </a:pPr>
-            <a:r>
-              <a:rPr sz="1200" b="0">
-                <a:solidFill>
-                  <a:srgbClr val="444444"/>
-                </a:solidFill>
-                <a:latin typeface="游ゴシック"/>
-              </a:rPr>
-              <a:t>平均83.0点・標準偏差7.48（最大）</a:t>
-            </a:r>
-          </a:p>
-          <a:p>
-            <a:pPr algn="l">
-              <a:spcAft>
-                <a:spcPts val="300"/>
-              </a:spcAft>
-            </a:pPr>
-            <a:r>
-              <a:rPr sz="1200" b="0">
-                <a:solidFill>
-                  <a:srgbClr val="444444"/>
-                </a:solidFill>
-                <a:latin typeface="游ゴシック"/>
-              </a:rPr>
-              <a:t>最低70点 ↔ 最高93点（差23点）</a:t>
-            </a:r>
-          </a:p>
-          <a:p>
-            <a:pPr algn="l">
-              <a:spcAft>
-                <a:spcPts val="300"/>
-              </a:spcAft>
-            </a:pPr>
-            <a:r>
-              <a:rPr sz="1200" b="0">
-                <a:solidFill>
-                  <a:srgbClr val="444444"/>
-                </a:solidFill>
-                <a:latin typeface="游ゴシック"/>
-              </a:rPr>
-              <a:t>ローパフォーマー（80点未満）4名</a:t>
-            </a:r>
-          </a:p>
-          <a:p>
-            <a:pPr algn="l">
-              <a:spcAft>
-                <a:spcPts val="300"/>
-              </a:spcAft>
-            </a:pPr>
-            <a:r>
-              <a:rPr sz="1200" b="0">
-                <a:solidFill>
-                  <a:srgbClr val="444444"/>
-                </a:solidFill>
-                <a:latin typeface="游ゴシック"/>
-              </a:rPr>
-              <a:t>　→ 全部門で最多</a:t>
-            </a:r>
-          </a:p>
-          <a:p>
-            <a:pPr algn="l">
-              <a:spcAft>
-                <a:spcPts val="300"/>
-              </a:spcAft>
-            </a:pPr>
-            <a:r>
-              <a:rPr sz="1200" b="0">
-                <a:solidFill>
-                  <a:srgbClr val="444444"/>
-                </a:solidFill>
-                <a:latin typeface="游ゴシック"/>
-              </a:rPr>
-              <a:t/>
-            </a:r>
-          </a:p>
-          <a:p>
-            <a:pPr algn="l">
-              <a:spcAft>
-                <a:spcPts val="300"/>
-              </a:spcAft>
-            </a:pPr>
-            <a:r>
-              <a:rPr sz="1200" b="1">
-                <a:solidFill>
-                  <a:srgbClr val="C00000"/>
-                </a:solidFill>
-                <a:latin typeface="游ゴシック"/>
-              </a:rPr>
-              <a:t>【なぜ問題か】</a:t>
-            </a:r>
-          </a:p>
-          <a:p>
-            <a:pPr algn="l">
-              <a:spcAft>
-                <a:spcPts val="300"/>
-              </a:spcAft>
-            </a:pPr>
-            <a:r>
-              <a:rPr sz="1200" b="0">
-                <a:solidFill>
-                  <a:srgbClr val="444444"/>
-                </a:solidFill>
-                <a:latin typeface="游ゴシック"/>
-              </a:rPr>
-              <a:t>営業力の個人依存＝</a:t>
-            </a:r>
-          </a:p>
-          <a:p>
-            <a:pPr algn="l">
-              <a:spcAft>
-                <a:spcPts val="300"/>
-              </a:spcAft>
-            </a:pPr>
-            <a:r>
-              <a:rPr sz="1200" b="0">
-                <a:solidFill>
-                  <a:srgbClr val="444444"/>
-                </a:solidFill>
-                <a:latin typeface="游ゴシック"/>
-              </a:rPr>
-              <a:t>売上の予測可能性が低下。</a:t>
-            </a:r>
-          </a:p>
-          <a:p>
-            <a:pPr algn="l">
-              <a:spcAft>
-                <a:spcPts val="300"/>
-              </a:spcAft>
-            </a:pPr>
-            <a:r>
-              <a:rPr sz="1200" b="0">
-                <a:solidFill>
-                  <a:srgbClr val="444444"/>
-                </a:solidFill>
-                <a:latin typeface="游ゴシック"/>
-              </a:rPr>
-              <a:t>トップが抜けた瞬間に</a:t>
-            </a:r>
-          </a:p>
-          <a:p>
-            <a:pPr algn="l">
-              <a:spcAft>
-                <a:spcPts val="300"/>
-              </a:spcAft>
-            </a:pPr>
-            <a:r>
-              <a:rPr sz="1200" b="0">
-                <a:solidFill>
-                  <a:srgbClr val="444444"/>
-                </a:solidFill>
-                <a:latin typeface="游ゴシック"/>
-              </a:rPr>
-              <a:t>収益が急落するリスクがある。</a:t>
-            </a:r>
-          </a:p>
-          <a:p>
-            <a:pPr algn="l">
-              <a:spcAft>
-                <a:spcPts val="300"/>
-              </a:spcAft>
-            </a:pPr>
-            <a:r>
-              <a:rPr sz="1200" b="0">
-                <a:solidFill>
-                  <a:srgbClr val="444444"/>
-                </a:solidFill>
-                <a:latin typeface="游ゴシック"/>
-              </a:rPr>
-              <a:t/>
-            </a:r>
-          </a:p>
-          <a:p>
-            <a:pPr algn="l">
-              <a:spcAft>
-                <a:spcPts val="300"/>
-              </a:spcAft>
-            </a:pPr>
-            <a:r>
-              <a:rPr sz="1200" b="1">
-                <a:solidFill>
-                  <a:srgbClr val="C00000"/>
-                </a:solidFill>
-                <a:latin typeface="游ゴシック"/>
-              </a:rPr>
-              <a:t>【施策】トップ営業のナレッジ移転・OJT</a:t>
+              <a:rPr sz="1200" b="0">
+                <a:solidFill>
+                  <a:srgbClr val="444444"/>
+                </a:solidFill>
+                <a:latin typeface="游ゴシック"/>
+              </a:rPr>
+              <a:t>■ マーケティング的解釈</a:t>
+            </a:r>
+          </a:p>
+          <a:p>
+            <a:pPr algn="l">
+              <a:spcAft>
+                <a:spcPts val="300"/>
+              </a:spcAft>
+            </a:pPr>
+            <a:r>
+              <a:rPr sz="1200" b="0">
+                <a:solidFill>
+                  <a:srgbClr val="444444"/>
+                </a:solidFill>
+                <a:latin typeface="游ゴシック"/>
+              </a:rPr>
+              <a:t>  人事の分布は「正規分布」ではなく</a:t>
+            </a:r>
+          </a:p>
+          <a:p>
+            <a:pPr algn="l">
+              <a:spcAft>
+                <a:spcPts val="300"/>
+              </a:spcAft>
+            </a:pPr>
+            <a:r>
+              <a:rPr sz="1200" b="0">
+                <a:solidFill>
+                  <a:srgbClr val="444444"/>
+                </a:solidFill>
+                <a:latin typeface="游ゴシック"/>
+              </a:rPr>
+              <a:t>  「圧縮された低水準の山」。</a:t>
+            </a:r>
+          </a:p>
+          <a:p>
+            <a:pPr algn="l">
+              <a:spcAft>
+                <a:spcPts val="300"/>
+              </a:spcAft>
+            </a:pPr>
+            <a:r>
+              <a:rPr sz="1200" b="0">
+                <a:solidFill>
+                  <a:srgbClr val="444444"/>
+                </a:solidFill>
+                <a:latin typeface="游ゴシック"/>
+              </a:rPr>
+              <a:t>  外部刺激（研修・人材交流）なしに</a:t>
+            </a:r>
+          </a:p>
+          <a:p>
+            <a:pPr algn="l">
+              <a:spcAft>
+                <a:spcPts val="300"/>
+              </a:spcAft>
+            </a:pPr>
+            <a:r>
+              <a:rPr sz="1200" b="0">
+                <a:solidFill>
+                  <a:srgbClr val="444444"/>
+                </a:solidFill>
+                <a:latin typeface="游ゴシック"/>
+              </a:rPr>
+              <a:t>  自然改善は期待しにくい状態。</a:t>
             </a:r>
           </a:p>
         </p:txBody>
@@ -10035,7 +10010,7 @@
                 </a:solidFill>
                 <a:latin typeface="游ゴシック"/>
               </a:rPr>
-              <a:t>課題2｜日別スコア成長トレンド</a:t>
+              <a:t>課題3｜マーケティング分析サマリー（会社データ）</a:t>
             </a:r>
           </a:p>
         </p:txBody>
@@ -10070,7 +10045,7 @@
                 </a:solidFill>
                 <a:latin typeface="游ゴシック"/>
               </a:rPr>
-              <a:t>受講者別折れ線グラフ　／　全体平均（破線）</a:t>
+              <a:t>強み・課題・リスクの三層構造</a:t>
             </a:r>
           </a:p>
         </p:txBody>
@@ -10118,46 +10093,22 @@
           </a:p>
         </p:txBody>
       </p:sp>
-      <p:pic>
-        <p:nvPicPr>
-          <p:cNvPr id="7" name="Picture 6" descr="graph4_trend.png"/>
-          <p:cNvPicPr>
-            <a:picLocks noChangeAspect="1"/>
-          </p:cNvPicPr>
-          <p:nvPr/>
-        </p:nvPicPr>
-        <p:blipFill>
-          <a:blip r:embed="rId2"/>
-          <a:stretch>
-            <a:fillRect/>
-          </a:stretch>
-        </p:blipFill>
+      <p:sp>
+        <p:nvSpPr>
+          <p:cNvPr id="7" name="Rectangle 6"/>
+          <p:cNvSpPr/>
+          <p:nvPr/>
+        </p:nvSpPr>
         <p:spPr>
           <a:xfrm>
             <a:off x="274320" y="1051560"/>
-            <a:ext cx="7315200" cy="5349240"/>
-          </a:xfrm>
-          <a:prstGeom prst="rect">
-            <a:avLst/>
-          </a:prstGeom>
-        </p:spPr>
-      </p:pic>
-      <p:sp>
-        <p:nvSpPr>
-          <p:cNvPr id="8" name="Rectangle 7"/>
-          <p:cNvSpPr/>
-          <p:nvPr/>
-        </p:nvSpPr>
-        <p:spPr>
-          <a:xfrm>
-            <a:off x="7772400" y="1051560"/>
-            <a:ext cx="4160520" cy="5349240"/>
+            <a:ext cx="3520440" cy="5486400"/>
           </a:xfrm>
           <a:prstGeom prst="rect">
             <a:avLst/>
           </a:prstGeom>
           <a:solidFill>
-            <a:srgbClr val="F5F5F5"/>
+            <a:srgbClr val="E2F4E8"/>
           </a:solidFill>
           <a:ln>
             <a:noFill/>
@@ -10187,20 +10138,20 @@
       </p:sp>
       <p:sp>
         <p:nvSpPr>
-          <p:cNvPr id="9" name="Rectangle 8"/>
+          <p:cNvPr id="8" name="Rectangle 7"/>
           <p:cNvSpPr/>
           <p:nvPr/>
         </p:nvSpPr>
         <p:spPr>
           <a:xfrm>
-            <a:off x="7772400" y="1051560"/>
-            <a:ext cx="64008" cy="5349240"/>
+            <a:off x="274320" y="1051560"/>
+            <a:ext cx="3520440" cy="457200"/>
           </a:xfrm>
           <a:prstGeom prst="rect">
             <a:avLst/>
           </a:prstGeom>
           <a:solidFill>
-            <a:srgbClr val="2E75B6"/>
+            <a:srgbClr val="1E7A45"/>
           </a:solidFill>
           <a:ln>
             <a:noFill/>
@@ -10230,14 +10181,14 @@
       </p:sp>
       <p:sp>
         <p:nvSpPr>
-          <p:cNvPr id="10" name="TextBox 9"/>
+          <p:cNvPr id="9" name="TextBox 8"/>
           <p:cNvSpPr txBox="1"/>
           <p:nvPr/>
         </p:nvSpPr>
         <p:spPr>
           <a:xfrm>
-            <a:off x="7936992" y="1143000"/>
-            <a:ext cx="3931920" cy="365760"/>
+            <a:off x="384048" y="1097280"/>
+            <a:ext cx="3291840" cy="384048"/>
           </a:xfrm>
           <a:prstGeom prst="rect">
             <a:avLst/>
@@ -10252,27 +10203,27 @@
           <a:p>
             <a:pPr algn="l"/>
             <a:r>
-              <a:rPr sz="1300" b="1" i="0">
-                <a:solidFill>
-                  <a:srgbClr val="2E75B6"/>
-                </a:solidFill>
-                <a:latin typeface="游ゴシック"/>
-              </a:rPr>
-              <a:t>成長トレンドの読み方</a:t>
-            </a:r>
-          </a:p>
-        </p:txBody>
-      </p:sp>
-      <p:sp>
-        <p:nvSpPr>
-          <p:cNvPr id="11" name="TextBox 10"/>
+              <a:rPr sz="1400" b="1" i="0">
+                <a:solidFill>
+                  <a:srgbClr val="FFFFFF"/>
+                </a:solidFill>
+                <a:latin typeface="游ゴシック"/>
+              </a:rPr>
+              <a:t>強み（開発・管理）</a:t>
+            </a:r>
+          </a:p>
+        </p:txBody>
+      </p:sp>
+      <p:sp>
+        <p:nvSpPr>
+          <p:cNvPr id="10" name="TextBox 9"/>
           <p:cNvSpPr txBox="1"/>
           <p:nvPr/>
         </p:nvSpPr>
         <p:spPr>
           <a:xfrm>
-            <a:off x="7936992" y="1554480"/>
-            <a:ext cx="3886200" cy="4754879"/>
+            <a:off x="411479" y="1572768"/>
+            <a:ext cx="3291840" cy="4892040"/>
           </a:xfrm>
           <a:prstGeom prst="rect">
             <a:avLst/>
@@ -10297,55 +10248,87 @@
                 </a:solidFill>
                 <a:latin typeface="游ゴシック"/>
               </a:rPr>
-              <a:t>■ 全体（黒破線）の動き</a:t>
-            </a:r>
-          </a:p>
-          <a:p>
-            <a:pPr algn="l">
-              <a:spcAft>
-                <a:spcPts val="300"/>
-              </a:spcAft>
-            </a:pPr>
-            <a:r>
-              <a:rPr sz="1200" b="0">
-                <a:solidFill>
-                  <a:srgbClr val="444444"/>
-                </a:solidFill>
-                <a:latin typeface="游ゴシック"/>
-              </a:rPr>
-              <a:t>  9/1：80.3点 → 9/5：89.8点</a:t>
-            </a:r>
-          </a:p>
-          <a:p>
-            <a:pPr algn="l">
-              <a:spcAft>
-                <a:spcPts val="300"/>
-              </a:spcAft>
-            </a:pPr>
-            <a:r>
-              <a:rPr sz="1200" b="0">
-                <a:solidFill>
-                  <a:srgbClr val="444444"/>
-                </a:solidFill>
-                <a:latin typeface="游ゴシック"/>
-              </a:rPr>
-              <a:t>  5日間で +9.5点の明確な成長</a:t>
-            </a:r>
-          </a:p>
-          <a:p>
-            <a:pPr algn="l">
-              <a:spcAft>
-                <a:spcPts val="300"/>
-              </a:spcAft>
-            </a:pPr>
-            <a:r>
-              <a:rPr sz="1200" b="0">
-                <a:solidFill>
-                  <a:srgbClr val="444444"/>
-                </a:solidFill>
-                <a:latin typeface="游ゴシック"/>
-              </a:rPr>
-              <a:t>  → 研修・学習効果が数値で確認できる</a:t>
+              <a:t>開発：平均88.9点・標準偏差3.57</a:t>
+            </a:r>
+          </a:p>
+          <a:p>
+            <a:pPr algn="l">
+              <a:spcAft>
+                <a:spcPts val="300"/>
+              </a:spcAft>
+            </a:pPr>
+            <a:r>
+              <a:rPr sz="1200" b="0">
+                <a:solidFill>
+                  <a:srgbClr val="444444"/>
+                </a:solidFill>
+                <a:latin typeface="游ゴシック"/>
+              </a:rPr>
+              <a:t>　→ 高品質かつ安定したアウトプット</a:t>
+            </a:r>
+          </a:p>
+          <a:p>
+            <a:pPr algn="l">
+              <a:spcAft>
+                <a:spcPts val="300"/>
+              </a:spcAft>
+            </a:pPr>
+            <a:r>
+              <a:rPr sz="1200" b="0">
+                <a:solidFill>
+                  <a:srgbClr val="444444"/>
+                </a:solidFill>
+                <a:latin typeface="游ゴシック"/>
+              </a:rPr>
+              <a:t>管理：平均87.1点・標準偏差5.62</a:t>
+            </a:r>
+          </a:p>
+          <a:p>
+            <a:pPr algn="l">
+              <a:spcAft>
+                <a:spcPts val="300"/>
+              </a:spcAft>
+            </a:pPr>
+            <a:r>
+              <a:rPr sz="1200" b="0">
+                <a:solidFill>
+                  <a:srgbClr val="444444"/>
+                </a:solidFill>
+                <a:latin typeface="游ゴシック"/>
+              </a:rPr>
+              <a:t>　→ 均整のとれた高水準チーム</a:t>
+            </a:r>
+          </a:p>
+          <a:p>
+            <a:pPr algn="l">
+              <a:spcAft>
+                <a:spcPts val="300"/>
+              </a:spcAft>
+            </a:pPr>
+            <a:r>
+              <a:rPr sz="1200" b="0">
+                <a:solidFill>
+                  <a:srgbClr val="444444"/>
+                </a:solidFill>
+                <a:latin typeface="游ゴシック"/>
+              </a:rPr>
+              <a:t>ハイパフォーマー率（90点以上）</a:t>
+            </a:r>
+          </a:p>
+          <a:p>
+            <a:pPr algn="l">
+              <a:spcAft>
+                <a:spcPts val="300"/>
+              </a:spcAft>
+            </a:pPr>
+            <a:r>
+              <a:rPr sz="1200" b="0">
+                <a:solidFill>
+                  <a:srgbClr val="444444"/>
+                </a:solidFill>
+                <a:latin typeface="游ゴシック"/>
+              </a:rPr>
+              <a:t>　開発40% / 管理37.5%</a:t>
             </a:r>
           </a:p>
           <a:p>
@@ -10371,61 +10354,285 @@
               </a:spcAft>
             </a:pPr>
             <a:r>
-              <a:rPr sz="1200" b="0">
-                <a:solidFill>
-                  <a:srgbClr val="444444"/>
-                </a:solidFill>
-                <a:latin typeface="游ゴシック"/>
-              </a:rPr>
-              <a:t>■ 注目すべき個人</a:t>
-            </a:r>
-          </a:p>
-          <a:p>
-            <a:pPr algn="l">
-              <a:spcAft>
-                <a:spcPts val="300"/>
-              </a:spcAft>
-            </a:pPr>
-            <a:r>
-              <a:rPr sz="1200" b="0">
-                <a:solidFill>
-                  <a:srgbClr val="444444"/>
-                </a:solidFill>
-                <a:latin typeface="游ゴシック"/>
-              </a:rPr>
-              <a:t>  田中一郎（緑）</a:t>
-            </a:r>
-          </a:p>
-          <a:p>
-            <a:pPr algn="l">
-              <a:spcAft>
-                <a:spcPts val="300"/>
-              </a:spcAft>
-            </a:pPr>
-            <a:r>
-              <a:rPr sz="1200" b="0">
-                <a:solidFill>
-                  <a:srgbClr val="444444"/>
-                </a:solidFill>
-                <a:latin typeface="游ゴシック"/>
-              </a:rPr>
-              <a:t>  　初日81.7 → 最終日91.0（+9.3点）</a:t>
-            </a:r>
-          </a:p>
-          <a:p>
-            <a:pPr algn="l">
-              <a:spcAft>
-                <a:spcPts val="300"/>
-              </a:spcAft>
-            </a:pPr>
-            <a:r>
-              <a:rPr sz="1200" b="0">
-                <a:solidFill>
-                  <a:srgbClr val="444444"/>
-                </a:solidFill>
-                <a:latin typeface="游ゴシック"/>
-              </a:rPr>
-              <a:t>  　中盤以降に急加速するタイプ</a:t>
+              <a:rPr sz="1200" b="1">
+                <a:solidFill>
+                  <a:srgbClr val="1E7A45"/>
+                </a:solidFill>
+                <a:latin typeface="游ゴシック"/>
+              </a:rPr>
+              <a:t>【施策】</a:t>
+            </a:r>
+          </a:p>
+          <a:p>
+            <a:pPr algn="l">
+              <a:spcAft>
+                <a:spcPts val="300"/>
+              </a:spcAft>
+            </a:pPr>
+            <a:r>
+              <a:rPr sz="1200" b="0">
+                <a:solidFill>
+                  <a:srgbClr val="444444"/>
+                </a:solidFill>
+                <a:latin typeface="游ゴシック"/>
+              </a:rPr>
+              <a:t>成功パターンをマニュアル化し</a:t>
+            </a:r>
+          </a:p>
+          <a:p>
+            <a:pPr algn="l">
+              <a:spcAft>
+                <a:spcPts val="300"/>
+              </a:spcAft>
+            </a:pPr>
+            <a:r>
+              <a:rPr sz="1200" b="0">
+                <a:solidFill>
+                  <a:srgbClr val="444444"/>
+                </a:solidFill>
+                <a:latin typeface="游ゴシック"/>
+              </a:rPr>
+              <a:t>営業・人事へ横展開する。</a:t>
+            </a:r>
+          </a:p>
+          <a:p>
+            <a:pPr algn="l">
+              <a:spcAft>
+                <a:spcPts val="300"/>
+              </a:spcAft>
+            </a:pPr>
+            <a:r>
+              <a:rPr sz="1200" b="0">
+                <a:solidFill>
+                  <a:srgbClr val="444444"/>
+                </a:solidFill>
+                <a:latin typeface="游ゴシック"/>
+              </a:rPr>
+              <a:t>高スコア者をメンターに任命。</a:t>
+            </a:r>
+          </a:p>
+        </p:txBody>
+      </p:sp>
+      <p:sp>
+        <p:nvSpPr>
+          <p:cNvPr id="11" name="Rectangle 10"/>
+          <p:cNvSpPr/>
+          <p:nvPr/>
+        </p:nvSpPr>
+        <p:spPr>
+          <a:xfrm>
+            <a:off x="4297680" y="1051560"/>
+            <a:ext cx="3520440" cy="5486400"/>
+          </a:xfrm>
+          <a:prstGeom prst="rect">
+            <a:avLst/>
+          </a:prstGeom>
+          <a:solidFill>
+            <a:srgbClr val="FDF2DC"/>
+          </a:solidFill>
+          <a:ln>
+            <a:noFill/>
+          </a:ln>
+        </p:spPr>
+        <p:style>
+          <a:lnRef idx="1">
+            <a:schemeClr val="accent1"/>
+          </a:lnRef>
+          <a:fillRef idx="3">
+            <a:schemeClr val="accent1"/>
+          </a:fillRef>
+          <a:effectRef idx="2">
+            <a:schemeClr val="accent1"/>
+          </a:effectRef>
+          <a:fontRef idx="minor">
+            <a:schemeClr val="lt1"/>
+          </a:fontRef>
+        </p:style>
+        <p:txBody>
+          <a:bodyPr rtlCol="0" anchor="ctr"/>
+          <a:lstStyle/>
+          <a:p>
+            <a:pPr algn="ctr"/>
+          </a:p>
+        </p:txBody>
+      </p:sp>
+      <p:sp>
+        <p:nvSpPr>
+          <p:cNvPr id="12" name="Rectangle 11"/>
+          <p:cNvSpPr/>
+          <p:nvPr/>
+        </p:nvSpPr>
+        <p:spPr>
+          <a:xfrm>
+            <a:off x="4297680" y="1051560"/>
+            <a:ext cx="3520440" cy="457200"/>
+          </a:xfrm>
+          <a:prstGeom prst="rect">
+            <a:avLst/>
+          </a:prstGeom>
+          <a:solidFill>
+            <a:srgbClr val="BF6C00"/>
+          </a:solidFill>
+          <a:ln>
+            <a:noFill/>
+          </a:ln>
+        </p:spPr>
+        <p:style>
+          <a:lnRef idx="1">
+            <a:schemeClr val="accent1"/>
+          </a:lnRef>
+          <a:fillRef idx="3">
+            <a:schemeClr val="accent1"/>
+          </a:fillRef>
+          <a:effectRef idx="2">
+            <a:schemeClr val="accent1"/>
+          </a:effectRef>
+          <a:fontRef idx="minor">
+            <a:schemeClr val="lt1"/>
+          </a:fontRef>
+        </p:style>
+        <p:txBody>
+          <a:bodyPr rtlCol="0" anchor="ctr"/>
+          <a:lstStyle/>
+          <a:p>
+            <a:pPr algn="ctr"/>
+          </a:p>
+        </p:txBody>
+      </p:sp>
+      <p:sp>
+        <p:nvSpPr>
+          <p:cNvPr id="13" name="TextBox 12"/>
+          <p:cNvSpPr txBox="1"/>
+          <p:nvPr/>
+        </p:nvSpPr>
+        <p:spPr>
+          <a:xfrm>
+            <a:off x="4407408" y="1097280"/>
+            <a:ext cx="3291840" cy="384048"/>
+          </a:xfrm>
+          <a:prstGeom prst="rect">
+            <a:avLst/>
+          </a:prstGeom>
+          <a:noFill/>
+        </p:spPr>
+        <p:txBody>
+          <a:bodyPr wrap="square">
+            <a:spAutoFit/>
+          </a:bodyPr>
+          <a:lstStyle/>
+          <a:p>
+            <a:pPr algn="l"/>
+            <a:r>
+              <a:rPr sz="1400" b="1" i="0">
+                <a:solidFill>
+                  <a:srgbClr val="FFFFFF"/>
+                </a:solidFill>
+                <a:latin typeface="游ゴシック"/>
+              </a:rPr>
+              <a:t>課題（人事）</a:t>
+            </a:r>
+          </a:p>
+        </p:txBody>
+      </p:sp>
+      <p:sp>
+        <p:nvSpPr>
+          <p:cNvPr id="14" name="TextBox 13"/>
+          <p:cNvSpPr txBox="1"/>
+          <p:nvPr/>
+        </p:nvSpPr>
+        <p:spPr>
+          <a:xfrm>
+            <a:off x="4434840" y="1572768"/>
+            <a:ext cx="3291840" cy="4892040"/>
+          </a:xfrm>
+          <a:prstGeom prst="rect">
+            <a:avLst/>
+          </a:prstGeom>
+          <a:noFill/>
+        </p:spPr>
+        <p:txBody>
+          <a:bodyPr wrap="square">
+            <a:spAutoFit/>
+          </a:bodyPr>
+          <a:lstStyle/>
+          <a:p>
+            <a:pPr algn="l">
+              <a:spcAft>
+                <a:spcPts val="300"/>
+              </a:spcAft>
+            </a:pPr>
+            <a:r>
+              <a:rPr sz="1200" b="0">
+                <a:solidFill>
+                  <a:srgbClr val="444444"/>
+                </a:solidFill>
+                <a:latin typeface="游ゴシック"/>
+              </a:rPr>
+              <a:t>平均79.3点（全体比 −5.6点）</a:t>
+            </a:r>
+          </a:p>
+          <a:p>
+            <a:pPr algn="l">
+              <a:spcAft>
+                <a:spcPts val="300"/>
+              </a:spcAft>
+            </a:pPr>
+            <a:r>
+              <a:rPr sz="1200" b="0">
+                <a:solidFill>
+                  <a:srgbClr val="444444"/>
+                </a:solidFill>
+                <a:latin typeface="游ゴシック"/>
+              </a:rPr>
+              <a:t>　→ 全部門で唯一80点未満</a:t>
+            </a:r>
+          </a:p>
+          <a:p>
+            <a:pPr algn="l">
+              <a:spcAft>
+                <a:spcPts val="300"/>
+              </a:spcAft>
+            </a:pPr>
+            <a:r>
+              <a:rPr sz="1200" b="0">
+                <a:solidFill>
+                  <a:srgbClr val="444444"/>
+                </a:solidFill>
+                <a:latin typeface="游ゴシック"/>
+              </a:rPr>
+              <a:t>ハイパフォーマー：0名</a:t>
+            </a:r>
+          </a:p>
+          <a:p>
+            <a:pPr algn="l">
+              <a:spcAft>
+                <a:spcPts val="300"/>
+              </a:spcAft>
+            </a:pPr>
+            <a:r>
+              <a:rPr sz="1200" b="0">
+                <a:solidFill>
+                  <a:srgbClr val="444444"/>
+                </a:solidFill>
+                <a:latin typeface="游ゴシック"/>
+              </a:rPr>
+              <a:t>標準偏差2.29（最小）</a:t>
+            </a:r>
+          </a:p>
+          <a:p>
+            <a:pPr algn="l">
+              <a:spcAft>
+                <a:spcPts val="300"/>
+              </a:spcAft>
+            </a:pPr>
+            <a:r>
+              <a:rPr sz="1200" b="0">
+                <a:solidFill>
+                  <a:srgbClr val="444444"/>
+                </a:solidFill>
+                <a:latin typeface="游ゴシック"/>
+              </a:rPr>
+              <a:t>　→ 全員が同じ低水準に均質化</a:t>
             </a:r>
           </a:p>
           <a:p>
@@ -10451,45 +10658,61 @@
               </a:spcAft>
             </a:pPr>
             <a:r>
-              <a:rPr sz="1200" b="0">
-                <a:solidFill>
-                  <a:srgbClr val="444444"/>
-                </a:solidFill>
-                <a:latin typeface="游ゴシック"/>
-              </a:rPr>
-              <a:t>  高橋花子（赤）</a:t>
-            </a:r>
-          </a:p>
-          <a:p>
-            <a:pPr algn="l">
-              <a:spcAft>
-                <a:spcPts val="300"/>
-              </a:spcAft>
-            </a:pPr>
-            <a:r>
-              <a:rPr sz="1200" b="0">
-                <a:solidFill>
-                  <a:srgbClr val="444444"/>
-                </a:solidFill>
-                <a:latin typeface="游ゴシック"/>
-              </a:rPr>
-              <a:t>  　初日92.5 → 最終日90.5（−2.0点）</a:t>
-            </a:r>
-          </a:p>
-          <a:p>
-            <a:pPr algn="l">
-              <a:spcAft>
-                <a:spcPts val="300"/>
-              </a:spcAft>
-            </a:pPr>
-            <a:r>
-              <a:rPr sz="1200" b="0">
-                <a:solidFill>
-                  <a:srgbClr val="444444"/>
-                </a:solidFill>
-                <a:latin typeface="游ゴシック"/>
-              </a:rPr>
-              <a:t>  　序盤から高水準だが後半に失速</a:t>
+              <a:rPr sz="1200" b="1">
+                <a:solidFill>
+                  <a:srgbClr val="BF6C00"/>
+                </a:solidFill>
+                <a:latin typeface="游ゴシック"/>
+              </a:rPr>
+              <a:t>【なぜ問題か】</a:t>
+            </a:r>
+          </a:p>
+          <a:p>
+            <a:pPr algn="l">
+              <a:spcAft>
+                <a:spcPts val="300"/>
+              </a:spcAft>
+            </a:pPr>
+            <a:r>
+              <a:rPr sz="1200" b="0">
+                <a:solidFill>
+                  <a:srgbClr val="444444"/>
+                </a:solidFill>
+                <a:latin typeface="游ゴシック"/>
+              </a:rPr>
+              <a:t>人事が弱いと採用品質・</a:t>
+            </a:r>
+          </a:p>
+          <a:p>
+            <a:pPr algn="l">
+              <a:spcAft>
+                <a:spcPts val="300"/>
+              </a:spcAft>
+            </a:pPr>
+            <a:r>
+              <a:rPr sz="1200" b="0">
+                <a:solidFill>
+                  <a:srgbClr val="444444"/>
+                </a:solidFill>
+                <a:latin typeface="游ゴシック"/>
+              </a:rPr>
+              <a:t>組織施策・人材育成に連鎖影響。</a:t>
+            </a:r>
+          </a:p>
+          <a:p>
+            <a:pPr algn="l">
+              <a:spcAft>
+                <a:spcPts val="300"/>
+              </a:spcAft>
+            </a:pPr>
+            <a:r>
+              <a:rPr sz="1200" b="0">
+                <a:solidFill>
+                  <a:srgbClr val="444444"/>
+                </a:solidFill>
+                <a:latin typeface="游ゴシック"/>
+              </a:rPr>
+              <a:t>組織全体の底を規定する部門。</a:t>
             </a:r>
           </a:p>
           <a:p>
@@ -10515,61 +10738,349 @@
               </a:spcAft>
             </a:pPr>
             <a:r>
-              <a:rPr sz="1200" b="0">
-                <a:solidFill>
-                  <a:srgbClr val="444444"/>
-                </a:solidFill>
-                <a:latin typeface="游ゴシック"/>
-              </a:rPr>
-              <a:t>■ 示唆</a:t>
-            </a:r>
-          </a:p>
-          <a:p>
-            <a:pPr algn="l">
-              <a:spcAft>
-                <a:spcPts val="300"/>
-              </a:spcAft>
-            </a:pPr>
-            <a:r>
-              <a:rPr sz="1200" b="0">
-                <a:solidFill>
-                  <a:srgbClr val="444444"/>
-                </a:solidFill>
-                <a:latin typeface="游ゴシック"/>
-              </a:rPr>
-              <a:t>  高初期スコア者は「維持」より</a:t>
-            </a:r>
-          </a:p>
-          <a:p>
-            <a:pPr algn="l">
-              <a:spcAft>
-                <a:spcPts val="300"/>
-              </a:spcAft>
-            </a:pPr>
-            <a:r>
-              <a:rPr sz="1200" b="0">
-                <a:solidFill>
-                  <a:srgbClr val="444444"/>
-                </a:solidFill>
-                <a:latin typeface="游ゴシック"/>
-              </a:rPr>
-              <a:t>  「次のレベル」への刺激が必要。</a:t>
-            </a:r>
-          </a:p>
-          <a:p>
-            <a:pPr algn="l">
-              <a:spcAft>
-                <a:spcPts val="300"/>
-              </a:spcAft>
-            </a:pPr>
-            <a:r>
-              <a:rPr sz="1200" b="0">
-                <a:solidFill>
-                  <a:srgbClr val="444444"/>
-                </a:solidFill>
-                <a:latin typeface="游ゴシック"/>
-              </a:rPr>
-              <a:t>  成長余地があるのは田中・佐藤。</a:t>
+              <a:rPr sz="1200" b="1">
+                <a:solidFill>
+                  <a:srgbClr val="BF6C00"/>
+                </a:solidFill>
+                <a:latin typeface="游ゴシック"/>
+              </a:rPr>
+              <a:t>【施策】外部研修・個別コーチング優先</a:t>
+            </a:r>
+          </a:p>
+        </p:txBody>
+      </p:sp>
+      <p:sp>
+        <p:nvSpPr>
+          <p:cNvPr id="15" name="Rectangle 14"/>
+          <p:cNvSpPr/>
+          <p:nvPr/>
+        </p:nvSpPr>
+        <p:spPr>
+          <a:xfrm>
+            <a:off x="8321040" y="1051560"/>
+            <a:ext cx="3520440" cy="5486400"/>
+          </a:xfrm>
+          <a:prstGeom prst="rect">
+            <a:avLst/>
+          </a:prstGeom>
+          <a:solidFill>
+            <a:srgbClr val="FCE8E8"/>
+          </a:solidFill>
+          <a:ln>
+            <a:noFill/>
+          </a:ln>
+        </p:spPr>
+        <p:style>
+          <a:lnRef idx="1">
+            <a:schemeClr val="accent1"/>
+          </a:lnRef>
+          <a:fillRef idx="3">
+            <a:schemeClr val="accent1"/>
+          </a:fillRef>
+          <a:effectRef idx="2">
+            <a:schemeClr val="accent1"/>
+          </a:effectRef>
+          <a:fontRef idx="minor">
+            <a:schemeClr val="lt1"/>
+          </a:fontRef>
+        </p:style>
+        <p:txBody>
+          <a:bodyPr rtlCol="0" anchor="ctr"/>
+          <a:lstStyle/>
+          <a:p>
+            <a:pPr algn="ctr"/>
+          </a:p>
+        </p:txBody>
+      </p:sp>
+      <p:sp>
+        <p:nvSpPr>
+          <p:cNvPr id="16" name="Rectangle 15"/>
+          <p:cNvSpPr/>
+          <p:nvPr/>
+        </p:nvSpPr>
+        <p:spPr>
+          <a:xfrm>
+            <a:off x="8321040" y="1051560"/>
+            <a:ext cx="3520440" cy="457200"/>
+          </a:xfrm>
+          <a:prstGeom prst="rect">
+            <a:avLst/>
+          </a:prstGeom>
+          <a:solidFill>
+            <a:srgbClr val="C00000"/>
+          </a:solidFill>
+          <a:ln>
+            <a:noFill/>
+          </a:ln>
+        </p:spPr>
+        <p:style>
+          <a:lnRef idx="1">
+            <a:schemeClr val="accent1"/>
+          </a:lnRef>
+          <a:fillRef idx="3">
+            <a:schemeClr val="accent1"/>
+          </a:fillRef>
+          <a:effectRef idx="2">
+            <a:schemeClr val="accent1"/>
+          </a:effectRef>
+          <a:fontRef idx="minor">
+            <a:schemeClr val="lt1"/>
+          </a:fontRef>
+        </p:style>
+        <p:txBody>
+          <a:bodyPr rtlCol="0" anchor="ctr"/>
+          <a:lstStyle/>
+          <a:p>
+            <a:pPr algn="ctr"/>
+          </a:p>
+        </p:txBody>
+      </p:sp>
+      <p:sp>
+        <p:nvSpPr>
+          <p:cNvPr id="17" name="TextBox 16"/>
+          <p:cNvSpPr txBox="1"/>
+          <p:nvPr/>
+        </p:nvSpPr>
+        <p:spPr>
+          <a:xfrm>
+            <a:off x="8430767" y="1097280"/>
+            <a:ext cx="3291840" cy="384048"/>
+          </a:xfrm>
+          <a:prstGeom prst="rect">
+            <a:avLst/>
+          </a:prstGeom>
+          <a:noFill/>
+        </p:spPr>
+        <p:txBody>
+          <a:bodyPr wrap="square">
+            <a:spAutoFit/>
+          </a:bodyPr>
+          <a:lstStyle/>
+          <a:p>
+            <a:pPr algn="l"/>
+            <a:r>
+              <a:rPr sz="1400" b="1" i="0">
+                <a:solidFill>
+                  <a:srgbClr val="FFFFFF"/>
+                </a:solidFill>
+                <a:latin typeface="游ゴシック"/>
+              </a:rPr>
+              <a:t>リスク（営業）</a:t>
+            </a:r>
+          </a:p>
+        </p:txBody>
+      </p:sp>
+      <p:sp>
+        <p:nvSpPr>
+          <p:cNvPr id="18" name="TextBox 17"/>
+          <p:cNvSpPr txBox="1"/>
+          <p:nvPr/>
+        </p:nvSpPr>
+        <p:spPr>
+          <a:xfrm>
+            <a:off x="8458200" y="1572768"/>
+            <a:ext cx="3291840" cy="4892040"/>
+          </a:xfrm>
+          <a:prstGeom prst="rect">
+            <a:avLst/>
+          </a:prstGeom>
+          <a:noFill/>
+        </p:spPr>
+        <p:txBody>
+          <a:bodyPr wrap="square">
+            <a:spAutoFit/>
+          </a:bodyPr>
+          <a:lstStyle/>
+          <a:p>
+            <a:pPr algn="l">
+              <a:spcAft>
+                <a:spcPts val="300"/>
+              </a:spcAft>
+            </a:pPr>
+            <a:r>
+              <a:rPr sz="1200" b="0">
+                <a:solidFill>
+                  <a:srgbClr val="444444"/>
+                </a:solidFill>
+                <a:latin typeface="游ゴシック"/>
+              </a:rPr>
+              <a:t>平均83.0点・標準偏差7.48（最大）</a:t>
+            </a:r>
+          </a:p>
+          <a:p>
+            <a:pPr algn="l">
+              <a:spcAft>
+                <a:spcPts val="300"/>
+              </a:spcAft>
+            </a:pPr>
+            <a:r>
+              <a:rPr sz="1200" b="0">
+                <a:solidFill>
+                  <a:srgbClr val="444444"/>
+                </a:solidFill>
+                <a:latin typeface="游ゴシック"/>
+              </a:rPr>
+              <a:t>最低70点 ↔ 最高93点（差23点）</a:t>
+            </a:r>
+          </a:p>
+          <a:p>
+            <a:pPr algn="l">
+              <a:spcAft>
+                <a:spcPts val="300"/>
+              </a:spcAft>
+            </a:pPr>
+            <a:r>
+              <a:rPr sz="1200" b="0">
+                <a:solidFill>
+                  <a:srgbClr val="444444"/>
+                </a:solidFill>
+                <a:latin typeface="游ゴシック"/>
+              </a:rPr>
+              <a:t>ローパフォーマー（80点未満）4名</a:t>
+            </a:r>
+          </a:p>
+          <a:p>
+            <a:pPr algn="l">
+              <a:spcAft>
+                <a:spcPts val="300"/>
+              </a:spcAft>
+            </a:pPr>
+            <a:r>
+              <a:rPr sz="1200" b="0">
+                <a:solidFill>
+                  <a:srgbClr val="444444"/>
+                </a:solidFill>
+                <a:latin typeface="游ゴシック"/>
+              </a:rPr>
+              <a:t>　→ 全部門で最多</a:t>
+            </a:r>
+          </a:p>
+          <a:p>
+            <a:pPr algn="l">
+              <a:spcAft>
+                <a:spcPts val="300"/>
+              </a:spcAft>
+            </a:pPr>
+            <a:r>
+              <a:rPr sz="1200" b="0">
+                <a:solidFill>
+                  <a:srgbClr val="444444"/>
+                </a:solidFill>
+                <a:latin typeface="游ゴシック"/>
+              </a:rPr>
+              <a:t/>
+            </a:r>
+          </a:p>
+          <a:p>
+            <a:pPr algn="l">
+              <a:spcAft>
+                <a:spcPts val="300"/>
+              </a:spcAft>
+            </a:pPr>
+            <a:r>
+              <a:rPr sz="1200" b="1">
+                <a:solidFill>
+                  <a:srgbClr val="C00000"/>
+                </a:solidFill>
+                <a:latin typeface="游ゴシック"/>
+              </a:rPr>
+              <a:t>【なぜ問題か】</a:t>
+            </a:r>
+          </a:p>
+          <a:p>
+            <a:pPr algn="l">
+              <a:spcAft>
+                <a:spcPts val="300"/>
+              </a:spcAft>
+            </a:pPr>
+            <a:r>
+              <a:rPr sz="1200" b="0">
+                <a:solidFill>
+                  <a:srgbClr val="444444"/>
+                </a:solidFill>
+                <a:latin typeface="游ゴシック"/>
+              </a:rPr>
+              <a:t>営業力の個人依存＝</a:t>
+            </a:r>
+          </a:p>
+          <a:p>
+            <a:pPr algn="l">
+              <a:spcAft>
+                <a:spcPts val="300"/>
+              </a:spcAft>
+            </a:pPr>
+            <a:r>
+              <a:rPr sz="1200" b="0">
+                <a:solidFill>
+                  <a:srgbClr val="444444"/>
+                </a:solidFill>
+                <a:latin typeface="游ゴシック"/>
+              </a:rPr>
+              <a:t>売上の予測可能性が低下。</a:t>
+            </a:r>
+          </a:p>
+          <a:p>
+            <a:pPr algn="l">
+              <a:spcAft>
+                <a:spcPts val="300"/>
+              </a:spcAft>
+            </a:pPr>
+            <a:r>
+              <a:rPr sz="1200" b="0">
+                <a:solidFill>
+                  <a:srgbClr val="444444"/>
+                </a:solidFill>
+                <a:latin typeface="游ゴシック"/>
+              </a:rPr>
+              <a:t>トップが抜けた瞬間に</a:t>
+            </a:r>
+          </a:p>
+          <a:p>
+            <a:pPr algn="l">
+              <a:spcAft>
+                <a:spcPts val="300"/>
+              </a:spcAft>
+            </a:pPr>
+            <a:r>
+              <a:rPr sz="1200" b="0">
+                <a:solidFill>
+                  <a:srgbClr val="444444"/>
+                </a:solidFill>
+                <a:latin typeface="游ゴシック"/>
+              </a:rPr>
+              <a:t>収益が急落するリスクがある。</a:t>
+            </a:r>
+          </a:p>
+          <a:p>
+            <a:pPr algn="l">
+              <a:spcAft>
+                <a:spcPts val="300"/>
+              </a:spcAft>
+            </a:pPr>
+            <a:r>
+              <a:rPr sz="1200" b="0">
+                <a:solidFill>
+                  <a:srgbClr val="444444"/>
+                </a:solidFill>
+                <a:latin typeface="游ゴシック"/>
+              </a:rPr>
+              <a:t/>
+            </a:r>
+          </a:p>
+          <a:p>
+            <a:pPr algn="l">
+              <a:spcAft>
+                <a:spcPts val="300"/>
+              </a:spcAft>
+            </a:pPr>
+            <a:r>
+              <a:rPr sz="1200" b="1">
+                <a:solidFill>
+                  <a:srgbClr val="C00000"/>
+                </a:solidFill>
+                <a:latin typeface="游ゴシック"/>
+              </a:rPr>
+              <a:t>【施策】トップ営業のナレッジ移転・OJT</a:t>
             </a:r>
           </a:p>
         </p:txBody>
@@ -10588,7 +11099,7 @@
     <p:bg>
       <p:bgPr>
         <a:solidFill>
-          <a:srgbClr val="FFFFFF"/>
+          <a:srgbClr val="1A3A2A"/>
         </a:solidFill>
         <a:effectLst/>
       </p:bgPr>
@@ -10608,14 +11119,14 @@
         </p:nvSpPr>
         <p:spPr>
           <a:xfrm>
-            <a:off x="0" y="0"/>
-            <a:ext cx="12188952" cy="960120"/>
+            <a:off x="0" y="2560320"/>
+            <a:ext cx="12188952" cy="2011680"/>
           </a:xfrm>
           <a:prstGeom prst="rect">
             <a:avLst/>
           </a:prstGeom>
           <a:solidFill>
-            <a:srgbClr val="1A2F5E"/>
+            <a:srgbClr val="1E7A45"/>
           </a:solidFill>
           <a:ln>
             <a:noFill/>
@@ -10651,14 +11162,14 @@
         </p:nvSpPr>
         <p:spPr>
           <a:xfrm>
-            <a:off x="0" y="960120"/>
-            <a:ext cx="12188952" cy="36576"/>
+            <a:off x="0" y="2560320"/>
+            <a:ext cx="274320" cy="2011680"/>
           </a:xfrm>
           <a:prstGeom prst="rect">
             <a:avLst/>
           </a:prstGeom>
           <a:solidFill>
-            <a:srgbClr val="2E75B6"/>
+            <a:srgbClr val="FFC000"/>
           </a:solidFill>
           <a:ln>
             <a:noFill/>
@@ -10694,8 +11205,8 @@
         </p:nvSpPr>
         <p:spPr>
           <a:xfrm>
-            <a:off x="320040" y="91440"/>
-            <a:ext cx="8686800" cy="594360"/>
+            <a:off x="548640" y="2606040"/>
+            <a:ext cx="10972800" cy="502920"/>
           </a:xfrm>
           <a:prstGeom prst="rect">
             <a:avLst/>
@@ -10710,13 +11221,13 @@
           <a:p>
             <a:pPr algn="l"/>
             <a:r>
-              <a:rPr sz="2600" b="1" i="0">
-                <a:solidFill>
-                  <a:srgbClr val="FFFFFF"/>
-                </a:solidFill>
-                <a:latin typeface="游ゴシック"/>
-              </a:rPr>
-              <a:t>課題2｜受講者×科目 スコアヒートマップ</a:t>
+              <a:rPr sz="1800" b="0" i="0">
+                <a:solidFill>
+                  <a:srgbClr val="E2F4E8"/>
+                </a:solidFill>
+                <a:latin typeface="游ゴシック"/>
+              </a:rPr>
+              <a:t>課題２</a:t>
             </a:r>
           </a:p>
         </p:txBody>
@@ -10729,8 +11240,8 @@
         </p:nvSpPr>
         <p:spPr>
           <a:xfrm>
-            <a:off x="320040" y="612648"/>
-            <a:ext cx="8686800" cy="347472"/>
+            <a:off x="548640" y="3017520"/>
+            <a:ext cx="10972800" cy="822960"/>
           </a:xfrm>
           <a:prstGeom prst="rect">
             <a:avLst/>
@@ -10745,33 +11256,68 @@
           <a:p>
             <a:pPr algn="l"/>
             <a:r>
-              <a:rPr sz="1200" b="0" i="0">
-                <a:solidFill>
-                  <a:srgbClr val="D6E4F7"/>
-                </a:solidFill>
-                <a:latin typeface="游ゴシック"/>
-              </a:rPr>
-              <a:t>赤（低）→黄（中）→緑（高）のグラデーション</a:t>
-            </a:r>
-          </a:p>
-        </p:txBody>
-      </p:sp>
-      <p:sp>
-        <p:nvSpPr>
-          <p:cNvPr id="6" name="Rectangle 5"/>
+              <a:rPr sz="3400" b="1" i="0">
+                <a:solidFill>
+                  <a:srgbClr val="FFFFFF"/>
+                </a:solidFill>
+                <a:latin typeface="游ゴシック"/>
+              </a:rPr>
+              <a:t>学校データ｜科目別スコア分析</a:t>
+            </a:r>
+          </a:p>
+        </p:txBody>
+      </p:sp>
+      <p:sp>
+        <p:nvSpPr>
+          <p:cNvPr id="6" name="TextBox 5"/>
+          <p:cNvSpPr txBox="1"/>
+          <p:nvPr/>
+        </p:nvSpPr>
+        <p:spPr>
+          <a:xfrm>
+            <a:off x="548640" y="3886200"/>
+            <a:ext cx="10972800" cy="502920"/>
+          </a:xfrm>
+          <a:prstGeom prst="rect">
+            <a:avLst/>
+          </a:prstGeom>
+          <a:noFill/>
+        </p:spPr>
+        <p:txBody>
+          <a:bodyPr wrap="square">
+            <a:spAutoFit/>
+          </a:bodyPr>
+          <a:lstStyle/>
+          <a:p>
+            <a:pPr algn="l"/>
+            <a:r>
+              <a:rPr sz="1500" b="0" i="0">
+                <a:solidFill>
+                  <a:srgbClr val="E2F4E8"/>
+                </a:solidFill>
+                <a:latin typeface="游ゴシック"/>
+              </a:rPr>
+              <a:t>受講者ごとの科目別スコア推移・成長幅・弱点科目を可視化する</a:t>
+            </a:r>
+          </a:p>
+        </p:txBody>
+      </p:sp>
+      <p:sp>
+        <p:nvSpPr>
+          <p:cNvPr id="7" name="Rectangle 6"/>
           <p:cNvSpPr/>
           <p:nvPr/>
         </p:nvSpPr>
         <p:spPr>
           <a:xfrm>
-            <a:off x="0" y="6565392"/>
-            <a:ext cx="12188952" cy="292608"/>
+            <a:off x="0" y="6217920"/>
+            <a:ext cx="12188952" cy="640080"/>
           </a:xfrm>
           <a:prstGeom prst="rect">
             <a:avLst/>
           </a:prstGeom>
           <a:solidFill>
-            <a:srgbClr val="1A2F5E"/>
+            <a:srgbClr val="0D2618"/>
           </a:solidFill>
           <a:ln>
             <a:noFill/>
@@ -10796,462 +11342,6 @@
           <a:lstStyle/>
           <a:p>
             <a:pPr algn="ctr"/>
-          </a:p>
-        </p:txBody>
-      </p:sp>
-      <p:pic>
-        <p:nvPicPr>
-          <p:cNvPr id="7" name="Picture 6" descr="graph5_heatmap.png"/>
-          <p:cNvPicPr>
-            <a:picLocks noChangeAspect="1"/>
-          </p:cNvPicPr>
-          <p:nvPr/>
-        </p:nvPicPr>
-        <p:blipFill>
-          <a:blip r:embed="rId2"/>
-          <a:stretch>
-            <a:fillRect/>
-          </a:stretch>
-        </p:blipFill>
-        <p:spPr>
-          <a:xfrm>
-            <a:off x="274320" y="1051560"/>
-            <a:ext cx="7315200" cy="5349240"/>
-          </a:xfrm>
-          <a:prstGeom prst="rect">
-            <a:avLst/>
-          </a:prstGeom>
-        </p:spPr>
-      </p:pic>
-      <p:sp>
-        <p:nvSpPr>
-          <p:cNvPr id="8" name="Rectangle 7"/>
-          <p:cNvSpPr/>
-          <p:nvPr/>
-        </p:nvSpPr>
-        <p:spPr>
-          <a:xfrm>
-            <a:off x="7772400" y="1051560"/>
-            <a:ext cx="4160520" cy="5349240"/>
-          </a:xfrm>
-          <a:prstGeom prst="rect">
-            <a:avLst/>
-          </a:prstGeom>
-          <a:solidFill>
-            <a:srgbClr val="F5F5F5"/>
-          </a:solidFill>
-          <a:ln>
-            <a:noFill/>
-          </a:ln>
-        </p:spPr>
-        <p:style>
-          <a:lnRef idx="1">
-            <a:schemeClr val="accent1"/>
-          </a:lnRef>
-          <a:fillRef idx="3">
-            <a:schemeClr val="accent1"/>
-          </a:fillRef>
-          <a:effectRef idx="2">
-            <a:schemeClr val="accent1"/>
-          </a:effectRef>
-          <a:fontRef idx="minor">
-            <a:schemeClr val="lt1"/>
-          </a:fontRef>
-        </p:style>
-        <p:txBody>
-          <a:bodyPr rtlCol="0" anchor="ctr"/>
-          <a:lstStyle/>
-          <a:p>
-            <a:pPr algn="ctr"/>
-          </a:p>
-        </p:txBody>
-      </p:sp>
-      <p:sp>
-        <p:nvSpPr>
-          <p:cNvPr id="9" name="Rectangle 8"/>
-          <p:cNvSpPr/>
-          <p:nvPr/>
-        </p:nvSpPr>
-        <p:spPr>
-          <a:xfrm>
-            <a:off x="7772400" y="1051560"/>
-            <a:ext cx="64008" cy="5349240"/>
-          </a:xfrm>
-          <a:prstGeom prst="rect">
-            <a:avLst/>
-          </a:prstGeom>
-          <a:solidFill>
-            <a:srgbClr val="2E75B6"/>
-          </a:solidFill>
-          <a:ln>
-            <a:noFill/>
-          </a:ln>
-        </p:spPr>
-        <p:style>
-          <a:lnRef idx="1">
-            <a:schemeClr val="accent1"/>
-          </a:lnRef>
-          <a:fillRef idx="3">
-            <a:schemeClr val="accent1"/>
-          </a:fillRef>
-          <a:effectRef idx="2">
-            <a:schemeClr val="accent1"/>
-          </a:effectRef>
-          <a:fontRef idx="minor">
-            <a:schemeClr val="lt1"/>
-          </a:fontRef>
-        </p:style>
-        <p:txBody>
-          <a:bodyPr rtlCol="0" anchor="ctr"/>
-          <a:lstStyle/>
-          <a:p>
-            <a:pPr algn="ctr"/>
-          </a:p>
-        </p:txBody>
-      </p:sp>
-      <p:sp>
-        <p:nvSpPr>
-          <p:cNvPr id="10" name="TextBox 9"/>
-          <p:cNvSpPr txBox="1"/>
-          <p:nvPr/>
-        </p:nvSpPr>
-        <p:spPr>
-          <a:xfrm>
-            <a:off x="7936992" y="1143000"/>
-            <a:ext cx="3931920" cy="365760"/>
-          </a:xfrm>
-          <a:prstGeom prst="rect">
-            <a:avLst/>
-          </a:prstGeom>
-          <a:noFill/>
-        </p:spPr>
-        <p:txBody>
-          <a:bodyPr wrap="square">
-            <a:spAutoFit/>
-          </a:bodyPr>
-          <a:lstStyle/>
-          <a:p>
-            <a:pPr algn="l"/>
-            <a:r>
-              <a:rPr sz="1300" b="1" i="0">
-                <a:solidFill>
-                  <a:srgbClr val="2E75B6"/>
-                </a:solidFill>
-                <a:latin typeface="游ゴシック"/>
-              </a:rPr>
-              <a:t>科目別・個人別の弱点マップ</a:t>
-            </a:r>
-          </a:p>
-        </p:txBody>
-      </p:sp>
-      <p:sp>
-        <p:nvSpPr>
-          <p:cNvPr id="11" name="TextBox 10"/>
-          <p:cNvSpPr txBox="1"/>
-          <p:nvPr/>
-        </p:nvSpPr>
-        <p:spPr>
-          <a:xfrm>
-            <a:off x="7936992" y="1554480"/>
-            <a:ext cx="3886200" cy="4754879"/>
-          </a:xfrm>
-          <a:prstGeom prst="rect">
-            <a:avLst/>
-          </a:prstGeom>
-          <a:noFill/>
-        </p:spPr>
-        <p:txBody>
-          <a:bodyPr wrap="square">
-            <a:spAutoFit/>
-          </a:bodyPr>
-          <a:lstStyle/>
-          <a:p>
-            <a:pPr algn="l">
-              <a:spcAft>
-                <a:spcPts val="300"/>
-              </a:spcAft>
-            </a:pPr>
-            <a:r>
-              <a:rPr sz="1200" b="0">
-                <a:solidFill>
-                  <a:srgbClr val="444444"/>
-                </a:solidFill>
-                <a:latin typeface="游ゴシック"/>
-              </a:rPr>
-              <a:t>■ 科目別平均（高→低）</a:t>
-            </a:r>
-          </a:p>
-          <a:p>
-            <a:pPr algn="l">
-              <a:spcAft>
-                <a:spcPts val="300"/>
-              </a:spcAft>
-            </a:pPr>
-            <a:r>
-              <a:rPr sz="1200" b="0">
-                <a:solidFill>
-                  <a:srgbClr val="444444"/>
-                </a:solidFill>
-                <a:latin typeface="游ゴシック"/>
-              </a:rPr>
-              <a:t>  英語   86.7点  ← 最も得意</a:t>
-            </a:r>
-          </a:p>
-          <a:p>
-            <a:pPr algn="l">
-              <a:spcAft>
-                <a:spcPts val="300"/>
-              </a:spcAft>
-            </a:pPr>
-            <a:r>
-              <a:rPr sz="1200" b="0">
-                <a:solidFill>
-                  <a:srgbClr val="444444"/>
-                </a:solidFill>
-                <a:latin typeface="游ゴシック"/>
-              </a:rPr>
-              <a:t>  社会   85.0点</a:t>
-            </a:r>
-          </a:p>
-          <a:p>
-            <a:pPr algn="l">
-              <a:spcAft>
-                <a:spcPts val="300"/>
-              </a:spcAft>
-            </a:pPr>
-            <a:r>
-              <a:rPr sz="1200" b="0">
-                <a:solidFill>
-                  <a:srgbClr val="444444"/>
-                </a:solidFill>
-                <a:latin typeface="游ゴシック"/>
-              </a:rPr>
-              <a:t>  数学   84.8点</a:t>
-            </a:r>
-          </a:p>
-          <a:p>
-            <a:pPr algn="l">
-              <a:spcAft>
-                <a:spcPts val="300"/>
-              </a:spcAft>
-            </a:pPr>
-            <a:r>
-              <a:rPr sz="1200" b="0">
-                <a:solidFill>
-                  <a:srgbClr val="444444"/>
-                </a:solidFill>
-                <a:latin typeface="游ゴシック"/>
-              </a:rPr>
-              <a:t>  理科   84.4点</a:t>
-            </a:r>
-          </a:p>
-          <a:p>
-            <a:pPr algn="l">
-              <a:spcAft>
-                <a:spcPts val="300"/>
-              </a:spcAft>
-            </a:pPr>
-            <a:r>
-              <a:rPr sz="1200" b="0">
-                <a:solidFill>
-                  <a:srgbClr val="444444"/>
-                </a:solidFill>
-                <a:latin typeface="游ゴシック"/>
-              </a:rPr>
-              <a:t>  国語   83.7点  ← 最も苦手</a:t>
-            </a:r>
-          </a:p>
-          <a:p>
-            <a:pPr algn="l">
-              <a:spcAft>
-                <a:spcPts val="300"/>
-              </a:spcAft>
-            </a:pPr>
-            <a:r>
-              <a:rPr sz="1200" b="0">
-                <a:solidFill>
-                  <a:srgbClr val="444444"/>
-                </a:solidFill>
-                <a:latin typeface="游ゴシック"/>
-              </a:rPr>
-              <a:t/>
-            </a:r>
-          </a:p>
-          <a:p>
-            <a:pPr algn="l">
-              <a:spcAft>
-                <a:spcPts val="300"/>
-              </a:spcAft>
-            </a:pPr>
-            <a:r>
-              <a:rPr sz="1200" b="0">
-                <a:solidFill>
-                  <a:srgbClr val="444444"/>
-                </a:solidFill>
-                <a:latin typeface="游ゴシック"/>
-              </a:rPr>
-              <a:t>■ 個人の弱点科目</a:t>
-            </a:r>
-          </a:p>
-          <a:p>
-            <a:pPr algn="l">
-              <a:spcAft>
-                <a:spcPts val="300"/>
-              </a:spcAft>
-            </a:pPr>
-            <a:r>
-              <a:rPr sz="1200" b="0">
-                <a:solidFill>
-                  <a:srgbClr val="444444"/>
-                </a:solidFill>
-                <a:latin typeface="游ゴシック"/>
-              </a:rPr>
-              <a:t>  佐藤次郎：国語65点・社会68点</a:t>
-            </a:r>
-          </a:p>
-          <a:p>
-            <a:pPr algn="l">
-              <a:spcAft>
-                <a:spcPts val="300"/>
-              </a:spcAft>
-            </a:pPr>
-            <a:r>
-              <a:rPr sz="1200" b="0">
-                <a:solidFill>
-                  <a:srgbClr val="444444"/>
-                </a:solidFill>
-                <a:latin typeface="游ゴシック"/>
-              </a:rPr>
-              <a:t>  　→ 文系科目に集中した弱点</a:t>
-            </a:r>
-          </a:p>
-          <a:p>
-            <a:pPr algn="l">
-              <a:spcAft>
-                <a:spcPts val="300"/>
-              </a:spcAft>
-            </a:pPr>
-            <a:r>
-              <a:rPr sz="1200" b="0">
-                <a:solidFill>
-                  <a:srgbClr val="444444"/>
-                </a:solidFill>
-                <a:latin typeface="游ゴシック"/>
-              </a:rPr>
-              <a:t>  山田太郎：国語75点が足を引く</a:t>
-            </a:r>
-          </a:p>
-          <a:p>
-            <a:pPr algn="l">
-              <a:spcAft>
-                <a:spcPts val="300"/>
-              </a:spcAft>
-            </a:pPr>
-            <a:r>
-              <a:rPr sz="1200" b="0">
-                <a:solidFill>
-                  <a:srgbClr val="444444"/>
-                </a:solidFill>
-                <a:latin typeface="游ゴシック"/>
-              </a:rPr>
-              <a:t>  鈴木花子：理科80点が他より低い</a:t>
-            </a:r>
-          </a:p>
-          <a:p>
-            <a:pPr algn="l">
-              <a:spcAft>
-                <a:spcPts val="300"/>
-              </a:spcAft>
-            </a:pPr>
-            <a:r>
-              <a:rPr sz="1200" b="0">
-                <a:solidFill>
-                  <a:srgbClr val="444444"/>
-                </a:solidFill>
-                <a:latin typeface="游ゴシック"/>
-              </a:rPr>
-              <a:t/>
-            </a:r>
-          </a:p>
-          <a:p>
-            <a:pPr algn="l">
-              <a:spcAft>
-                <a:spcPts val="300"/>
-              </a:spcAft>
-            </a:pPr>
-            <a:r>
-              <a:rPr sz="1200" b="0">
-                <a:solidFill>
-                  <a:srgbClr val="444444"/>
-                </a:solidFill>
-                <a:latin typeface="游ゴシック"/>
-              </a:rPr>
-              <a:t>■ マーケティング示唆</a:t>
-            </a:r>
-          </a:p>
-          <a:p>
-            <a:pPr algn="l">
-              <a:spcAft>
-                <a:spcPts val="300"/>
-              </a:spcAft>
-            </a:pPr>
-            <a:r>
-              <a:rPr sz="1200" b="0">
-                <a:solidFill>
-                  <a:srgbClr val="444444"/>
-                </a:solidFill>
-                <a:latin typeface="游ゴシック"/>
-              </a:rPr>
-              <a:t>  弱点は「人×科目」の組み合わせで</a:t>
-            </a:r>
-          </a:p>
-          <a:p>
-            <a:pPr algn="l">
-              <a:spcAft>
-                <a:spcPts val="300"/>
-              </a:spcAft>
-            </a:pPr>
-            <a:r>
-              <a:rPr sz="1200" b="0">
-                <a:solidFill>
-                  <a:srgbClr val="444444"/>
-                </a:solidFill>
-                <a:latin typeface="游ゴシック"/>
-              </a:rPr>
-              <a:t>  特定できる。全員一律の研修より</a:t>
-            </a:r>
-          </a:p>
-          <a:p>
-            <a:pPr algn="l">
-              <a:spcAft>
-                <a:spcPts val="300"/>
-              </a:spcAft>
-            </a:pPr>
-            <a:r>
-              <a:rPr sz="1200" b="0">
-                <a:solidFill>
-                  <a:srgbClr val="444444"/>
-                </a:solidFill>
-                <a:latin typeface="游ゴシック"/>
-              </a:rPr>
-              <a:t>  弱点科目への個別フォローが</a:t>
-            </a:r>
-          </a:p>
-          <a:p>
-            <a:pPr algn="l">
-              <a:spcAft>
-                <a:spcPts val="300"/>
-              </a:spcAft>
-            </a:pPr>
-            <a:r>
-              <a:rPr sz="1200" b="0">
-                <a:solidFill>
-                  <a:srgbClr val="444444"/>
-                </a:solidFill>
-                <a:latin typeface="游ゴシック"/>
-              </a:rPr>
-              <a:t>  最短で全体平均を引き上げる。</a:t>
-            </a:r>
           </a:p>
         </p:txBody>
       </p:sp>
@@ -11397,7 +11487,7 @@
                 </a:solidFill>
                 <a:latin typeface="游ゴシック"/>
               </a:rPr>
-              <a:t>課題2｜スコア分布・成長幅ランキング</a:t>
+              <a:t>課題2｜日別スコア成長トレンド（学校データ）</a:t>
             </a:r>
           </a:p>
         </p:txBody>
@@ -11432,7 +11522,7 @@
                 </a:solidFill>
                 <a:latin typeface="游ゴシック"/>
               </a:rPr>
-              <a:t>箱ひげ図（分布）＋横棒グラフ（初日→最終日の変化）</a:t>
+              <a:t>受講者別折れ線グラフ　／　全体平均（破線）</a:t>
             </a:r>
           </a:p>
         </p:txBody>
@@ -11482,7 +11572,7 @@
       </p:sp>
       <p:pic>
         <p:nvPicPr>
-          <p:cNvPr id="7" name="Picture 6" descr="graph6_boxplot_growth.png"/>
+          <p:cNvPr id="7" name="Picture 6" descr="graph4_trend.png"/>
           <p:cNvPicPr>
             <a:picLocks noChangeAspect="1"/>
           </p:cNvPicPr>
@@ -11497,13 +11587,445 @@
         <p:spPr>
           <a:xfrm>
             <a:off x="274320" y="1051560"/>
-            <a:ext cx="11612880" cy="5349240"/>
+            <a:ext cx="7315200" cy="5349240"/>
           </a:xfrm>
           <a:prstGeom prst="rect">
             <a:avLst/>
           </a:prstGeom>
         </p:spPr>
       </p:pic>
+      <p:sp>
+        <p:nvSpPr>
+          <p:cNvPr id="8" name="Rectangle 7"/>
+          <p:cNvSpPr/>
+          <p:nvPr/>
+        </p:nvSpPr>
+        <p:spPr>
+          <a:xfrm>
+            <a:off x="7772400" y="1051560"/>
+            <a:ext cx="4160520" cy="5349240"/>
+          </a:xfrm>
+          <a:prstGeom prst="rect">
+            <a:avLst/>
+          </a:prstGeom>
+          <a:solidFill>
+            <a:srgbClr val="F5F5F5"/>
+          </a:solidFill>
+          <a:ln>
+            <a:noFill/>
+          </a:ln>
+        </p:spPr>
+        <p:style>
+          <a:lnRef idx="1">
+            <a:schemeClr val="accent1"/>
+          </a:lnRef>
+          <a:fillRef idx="3">
+            <a:schemeClr val="accent1"/>
+          </a:fillRef>
+          <a:effectRef idx="2">
+            <a:schemeClr val="accent1"/>
+          </a:effectRef>
+          <a:fontRef idx="minor">
+            <a:schemeClr val="lt1"/>
+          </a:fontRef>
+        </p:style>
+        <p:txBody>
+          <a:bodyPr rtlCol="0" anchor="ctr"/>
+          <a:lstStyle/>
+          <a:p>
+            <a:pPr algn="ctr"/>
+          </a:p>
+        </p:txBody>
+      </p:sp>
+      <p:sp>
+        <p:nvSpPr>
+          <p:cNvPr id="9" name="Rectangle 8"/>
+          <p:cNvSpPr/>
+          <p:nvPr/>
+        </p:nvSpPr>
+        <p:spPr>
+          <a:xfrm>
+            <a:off x="7772400" y="1051560"/>
+            <a:ext cx="64008" cy="5349240"/>
+          </a:xfrm>
+          <a:prstGeom prst="rect">
+            <a:avLst/>
+          </a:prstGeom>
+          <a:solidFill>
+            <a:srgbClr val="2E75B6"/>
+          </a:solidFill>
+          <a:ln>
+            <a:noFill/>
+          </a:ln>
+        </p:spPr>
+        <p:style>
+          <a:lnRef idx="1">
+            <a:schemeClr val="accent1"/>
+          </a:lnRef>
+          <a:fillRef idx="3">
+            <a:schemeClr val="accent1"/>
+          </a:fillRef>
+          <a:effectRef idx="2">
+            <a:schemeClr val="accent1"/>
+          </a:effectRef>
+          <a:fontRef idx="minor">
+            <a:schemeClr val="lt1"/>
+          </a:fontRef>
+        </p:style>
+        <p:txBody>
+          <a:bodyPr rtlCol="0" anchor="ctr"/>
+          <a:lstStyle/>
+          <a:p>
+            <a:pPr algn="ctr"/>
+          </a:p>
+        </p:txBody>
+      </p:sp>
+      <p:sp>
+        <p:nvSpPr>
+          <p:cNvPr id="10" name="TextBox 9"/>
+          <p:cNvSpPr txBox="1"/>
+          <p:nvPr/>
+        </p:nvSpPr>
+        <p:spPr>
+          <a:xfrm>
+            <a:off x="7936992" y="1143000"/>
+            <a:ext cx="3931920" cy="365760"/>
+          </a:xfrm>
+          <a:prstGeom prst="rect">
+            <a:avLst/>
+          </a:prstGeom>
+          <a:noFill/>
+        </p:spPr>
+        <p:txBody>
+          <a:bodyPr wrap="square">
+            <a:spAutoFit/>
+          </a:bodyPr>
+          <a:lstStyle/>
+          <a:p>
+            <a:pPr algn="l"/>
+            <a:r>
+              <a:rPr sz="1300" b="1" i="0">
+                <a:solidFill>
+                  <a:srgbClr val="2E75B6"/>
+                </a:solidFill>
+                <a:latin typeface="游ゴシック"/>
+              </a:rPr>
+              <a:t>成長トレンドの読み方</a:t>
+            </a:r>
+          </a:p>
+        </p:txBody>
+      </p:sp>
+      <p:sp>
+        <p:nvSpPr>
+          <p:cNvPr id="11" name="TextBox 10"/>
+          <p:cNvSpPr txBox="1"/>
+          <p:nvPr/>
+        </p:nvSpPr>
+        <p:spPr>
+          <a:xfrm>
+            <a:off x="7936992" y="1554480"/>
+            <a:ext cx="3886200" cy="4754879"/>
+          </a:xfrm>
+          <a:prstGeom prst="rect">
+            <a:avLst/>
+          </a:prstGeom>
+          <a:noFill/>
+        </p:spPr>
+        <p:txBody>
+          <a:bodyPr wrap="square">
+            <a:spAutoFit/>
+          </a:bodyPr>
+          <a:lstStyle/>
+          <a:p>
+            <a:pPr algn="l">
+              <a:spcAft>
+                <a:spcPts val="300"/>
+              </a:spcAft>
+            </a:pPr>
+            <a:r>
+              <a:rPr sz="1200" b="0">
+                <a:solidFill>
+                  <a:srgbClr val="444444"/>
+                </a:solidFill>
+                <a:latin typeface="游ゴシック"/>
+              </a:rPr>
+              <a:t>■ 全体（黒破線）の動き</a:t>
+            </a:r>
+          </a:p>
+          <a:p>
+            <a:pPr algn="l">
+              <a:spcAft>
+                <a:spcPts val="300"/>
+              </a:spcAft>
+            </a:pPr>
+            <a:r>
+              <a:rPr sz="1200" b="0">
+                <a:solidFill>
+                  <a:srgbClr val="444444"/>
+                </a:solidFill>
+                <a:latin typeface="游ゴシック"/>
+              </a:rPr>
+              <a:t>  9/1：80.3点 → 9/5：89.8点</a:t>
+            </a:r>
+          </a:p>
+          <a:p>
+            <a:pPr algn="l">
+              <a:spcAft>
+                <a:spcPts val="300"/>
+              </a:spcAft>
+            </a:pPr>
+            <a:r>
+              <a:rPr sz="1200" b="0">
+                <a:solidFill>
+                  <a:srgbClr val="444444"/>
+                </a:solidFill>
+                <a:latin typeface="游ゴシック"/>
+              </a:rPr>
+              <a:t>  5日間で +9.5点の明確な成長</a:t>
+            </a:r>
+          </a:p>
+          <a:p>
+            <a:pPr algn="l">
+              <a:spcAft>
+                <a:spcPts val="300"/>
+              </a:spcAft>
+            </a:pPr>
+            <a:r>
+              <a:rPr sz="1200" b="0">
+                <a:solidFill>
+                  <a:srgbClr val="444444"/>
+                </a:solidFill>
+                <a:latin typeface="游ゴシック"/>
+              </a:rPr>
+              <a:t>  → 研修・学習効果が数値で確認できる</a:t>
+            </a:r>
+          </a:p>
+          <a:p>
+            <a:pPr algn="l">
+              <a:spcAft>
+                <a:spcPts val="300"/>
+              </a:spcAft>
+            </a:pPr>
+            <a:r>
+              <a:rPr sz="1200" b="0">
+                <a:solidFill>
+                  <a:srgbClr val="444444"/>
+                </a:solidFill>
+                <a:latin typeface="游ゴシック"/>
+              </a:rPr>
+              <a:t/>
+            </a:r>
+          </a:p>
+          <a:p>
+            <a:pPr algn="l">
+              <a:spcAft>
+                <a:spcPts val="300"/>
+              </a:spcAft>
+            </a:pPr>
+            <a:r>
+              <a:rPr sz="1200" b="0">
+                <a:solidFill>
+                  <a:srgbClr val="444444"/>
+                </a:solidFill>
+                <a:latin typeface="游ゴシック"/>
+              </a:rPr>
+              <a:t>■ 注目すべき個人</a:t>
+            </a:r>
+          </a:p>
+          <a:p>
+            <a:pPr algn="l">
+              <a:spcAft>
+                <a:spcPts val="300"/>
+              </a:spcAft>
+            </a:pPr>
+            <a:r>
+              <a:rPr sz="1200" b="0">
+                <a:solidFill>
+                  <a:srgbClr val="444444"/>
+                </a:solidFill>
+                <a:latin typeface="游ゴシック"/>
+              </a:rPr>
+              <a:t>  田中一郎（緑）</a:t>
+            </a:r>
+          </a:p>
+          <a:p>
+            <a:pPr algn="l">
+              <a:spcAft>
+                <a:spcPts val="300"/>
+              </a:spcAft>
+            </a:pPr>
+            <a:r>
+              <a:rPr sz="1200" b="0">
+                <a:solidFill>
+                  <a:srgbClr val="444444"/>
+                </a:solidFill>
+                <a:latin typeface="游ゴシック"/>
+              </a:rPr>
+              <a:t>  　初日81.7 → 最終日91.0（+9.3点）</a:t>
+            </a:r>
+          </a:p>
+          <a:p>
+            <a:pPr algn="l">
+              <a:spcAft>
+                <a:spcPts val="300"/>
+              </a:spcAft>
+            </a:pPr>
+            <a:r>
+              <a:rPr sz="1200" b="0">
+                <a:solidFill>
+                  <a:srgbClr val="444444"/>
+                </a:solidFill>
+                <a:latin typeface="游ゴシック"/>
+              </a:rPr>
+              <a:t>  　中盤以降に急加速するタイプ</a:t>
+            </a:r>
+          </a:p>
+          <a:p>
+            <a:pPr algn="l">
+              <a:spcAft>
+                <a:spcPts val="300"/>
+              </a:spcAft>
+            </a:pPr>
+            <a:r>
+              <a:rPr sz="1200" b="0">
+                <a:solidFill>
+                  <a:srgbClr val="444444"/>
+                </a:solidFill>
+                <a:latin typeface="游ゴシック"/>
+              </a:rPr>
+              <a:t/>
+            </a:r>
+          </a:p>
+          <a:p>
+            <a:pPr algn="l">
+              <a:spcAft>
+                <a:spcPts val="300"/>
+              </a:spcAft>
+            </a:pPr>
+            <a:r>
+              <a:rPr sz="1200" b="0">
+                <a:solidFill>
+                  <a:srgbClr val="444444"/>
+                </a:solidFill>
+                <a:latin typeface="游ゴシック"/>
+              </a:rPr>
+              <a:t>  高橋花子（赤）</a:t>
+            </a:r>
+          </a:p>
+          <a:p>
+            <a:pPr algn="l">
+              <a:spcAft>
+                <a:spcPts val="300"/>
+              </a:spcAft>
+            </a:pPr>
+            <a:r>
+              <a:rPr sz="1200" b="0">
+                <a:solidFill>
+                  <a:srgbClr val="444444"/>
+                </a:solidFill>
+                <a:latin typeface="游ゴシック"/>
+              </a:rPr>
+              <a:t>  　初日92.5 → 最終日90.5（−2.0点）</a:t>
+            </a:r>
+          </a:p>
+          <a:p>
+            <a:pPr algn="l">
+              <a:spcAft>
+                <a:spcPts val="300"/>
+              </a:spcAft>
+            </a:pPr>
+            <a:r>
+              <a:rPr sz="1200" b="0">
+                <a:solidFill>
+                  <a:srgbClr val="444444"/>
+                </a:solidFill>
+                <a:latin typeface="游ゴシック"/>
+              </a:rPr>
+              <a:t>  　序盤から高水準だが後半に失速</a:t>
+            </a:r>
+          </a:p>
+          <a:p>
+            <a:pPr algn="l">
+              <a:spcAft>
+                <a:spcPts val="300"/>
+              </a:spcAft>
+            </a:pPr>
+            <a:r>
+              <a:rPr sz="1200" b="0">
+                <a:solidFill>
+                  <a:srgbClr val="444444"/>
+                </a:solidFill>
+                <a:latin typeface="游ゴシック"/>
+              </a:rPr>
+              <a:t/>
+            </a:r>
+          </a:p>
+          <a:p>
+            <a:pPr algn="l">
+              <a:spcAft>
+                <a:spcPts val="300"/>
+              </a:spcAft>
+            </a:pPr>
+            <a:r>
+              <a:rPr sz="1200" b="0">
+                <a:solidFill>
+                  <a:srgbClr val="444444"/>
+                </a:solidFill>
+                <a:latin typeface="游ゴシック"/>
+              </a:rPr>
+              <a:t>■ 示唆</a:t>
+            </a:r>
+          </a:p>
+          <a:p>
+            <a:pPr algn="l">
+              <a:spcAft>
+                <a:spcPts val="300"/>
+              </a:spcAft>
+            </a:pPr>
+            <a:r>
+              <a:rPr sz="1200" b="0">
+                <a:solidFill>
+                  <a:srgbClr val="444444"/>
+                </a:solidFill>
+                <a:latin typeface="游ゴシック"/>
+              </a:rPr>
+              <a:t>  高初期スコア者は「維持」より</a:t>
+            </a:r>
+          </a:p>
+          <a:p>
+            <a:pPr algn="l">
+              <a:spcAft>
+                <a:spcPts val="300"/>
+              </a:spcAft>
+            </a:pPr>
+            <a:r>
+              <a:rPr sz="1200" b="0">
+                <a:solidFill>
+                  <a:srgbClr val="444444"/>
+                </a:solidFill>
+                <a:latin typeface="游ゴシック"/>
+              </a:rPr>
+              <a:t>  「次のレベル」への刺激が必要。</a:t>
+            </a:r>
+          </a:p>
+          <a:p>
+            <a:pPr algn="l">
+              <a:spcAft>
+                <a:spcPts val="300"/>
+              </a:spcAft>
+            </a:pPr>
+            <a:r>
+              <a:rPr sz="1200" b="0">
+                <a:solidFill>
+                  <a:srgbClr val="444444"/>
+                </a:solidFill>
+                <a:latin typeface="游ゴシック"/>
+              </a:rPr>
+              <a:t>  成長余地があるのは田中・佐藤。</a:t>
+            </a:r>
+          </a:p>
+        </p:txBody>
+      </p:sp>
     </p:spTree>
   </p:cSld>
   <p:clrMapOvr>

--- a/課題データ分析レポート.pptx
+++ b/課題データ分析レポート.pptx
@@ -3909,7 +3909,7 @@
                 </a:solidFill>
                 <a:latin typeface="游ゴシック"/>
               </a:rPr>
-              <a:t>  佐藤次郎：国語65点・社会68点</a:t>
+              <a:t>  佐藤次郎：社会68.0点・国語71.0点</a:t>
             </a:r>
           </a:p>
           <a:p>
@@ -3941,23 +3941,23 @@
                 </a:solidFill>
                 <a:latin typeface="游ゴシック"/>
               </a:rPr>
-              <a:t>  山田太郎：国語75点が足を引く</a:t>
-            </a:r>
-          </a:p>
-          <a:p>
-            <a:pPr algn="l">
-              <a:spcAft>
-                <a:spcPts val="300"/>
-              </a:spcAft>
-            </a:pPr>
-            <a:r>
-              <a:rPr sz="1200" b="0">
-                <a:solidFill>
-                  <a:srgbClr val="444444"/>
-                </a:solidFill>
-                <a:latin typeface="游ゴシック"/>
-              </a:rPr>
-              <a:t>  鈴木花子：理科80点が他より低い</a:t>
+              <a:t>  山田太郎：国語81.0点が他より低い</a:t>
+            </a:r>
+          </a:p>
+          <a:p>
+            <a:pPr algn="l">
+              <a:spcAft>
+                <a:spcPts val="300"/>
+              </a:spcAft>
+            </a:pPr>
+            <a:r>
+              <a:rPr sz="1200" b="0">
+                <a:solidFill>
+                  <a:srgbClr val="444444"/>
+                </a:solidFill>
+                <a:latin typeface="游ゴシック"/>
+              </a:rPr>
+              <a:t>  鈴木花子：数学83.0点が他より低い</a:t>
             </a:r>
           </a:p>
           <a:p>
